--- a/docs/pptx/auc3/ritu-auc3-scatter-cg.pptx
+++ b/docs/pptx/auc3/ritu-auc3-scatter-cg.pptx
@@ -3368,7 +3368,7 @@
           </p:nvSpPr>
           <p:spPr>
             <a:xfrm>
-              <a:off x="2849165" y="4491920"/>
+              <a:off x="2849170" y="4491921"/>
               <a:ext cx="49651" cy="49651"/>
             </a:xfrm>
             <a:prstGeom prst="ellipse">
@@ -4278,7 +4278,7 @@
           </p:nvSpPr>
           <p:spPr>
             <a:xfrm>
-              <a:off x="2767870" y="3951060"/>
+              <a:off x="3849184" y="4573368"/>
               <a:ext cx="49651" cy="49651"/>
             </a:xfrm>
             <a:prstGeom prst="ellipse">
@@ -4313,7 +4313,7 @@
           </p:nvSpPr>
           <p:spPr>
             <a:xfrm>
-              <a:off x="3849184" y="4573368"/>
+              <a:off x="2441468" y="4840137"/>
               <a:ext cx="49651" cy="49651"/>
             </a:xfrm>
             <a:prstGeom prst="ellipse">
@@ -4348,7 +4348,7 @@
           </p:nvSpPr>
           <p:spPr>
             <a:xfrm>
-              <a:off x="2441468" y="4840137"/>
+              <a:off x="3052642" y="3989203"/>
               <a:ext cx="49651" cy="49651"/>
             </a:xfrm>
             <a:prstGeom prst="ellipse">
@@ -4383,7 +4383,7 @@
           </p:nvSpPr>
           <p:spPr>
             <a:xfrm>
-              <a:off x="3052642" y="3989203"/>
+              <a:off x="3922648" y="4834462"/>
               <a:ext cx="49651" cy="49651"/>
             </a:xfrm>
             <a:prstGeom prst="ellipse">
@@ -4418,7 +4418,7 @@
           </p:nvSpPr>
           <p:spPr>
             <a:xfrm>
-              <a:off x="3922648" y="4834462"/>
+              <a:off x="3952033" y="4261499"/>
               <a:ext cx="49651" cy="49651"/>
             </a:xfrm>
             <a:prstGeom prst="ellipse">
@@ -4453,7 +4453,7 @@
           </p:nvSpPr>
           <p:spPr>
             <a:xfrm>
-              <a:off x="3952033" y="4261499"/>
+              <a:off x="1301453" y="5082764"/>
               <a:ext cx="49651" cy="49651"/>
             </a:xfrm>
             <a:prstGeom prst="ellipse">
@@ -4488,7 +4488,7 @@
           </p:nvSpPr>
           <p:spPr>
             <a:xfrm>
-              <a:off x="1301453" y="5082764"/>
+              <a:off x="4552740" y="4491299"/>
               <a:ext cx="49651" cy="49651"/>
             </a:xfrm>
             <a:prstGeom prst="ellipse">
@@ -4523,7 +4523,7 @@
           </p:nvSpPr>
           <p:spPr>
             <a:xfrm>
-              <a:off x="4552740" y="4491299"/>
+              <a:off x="2730663" y="4862931"/>
               <a:ext cx="49651" cy="49651"/>
             </a:xfrm>
             <a:prstGeom prst="ellipse">
@@ -4558,7 +4558,7 @@
           </p:nvSpPr>
           <p:spPr>
             <a:xfrm>
-              <a:off x="2730663" y="4862931"/>
+              <a:off x="3976536" y="3456872"/>
               <a:ext cx="49651" cy="49651"/>
             </a:xfrm>
             <a:prstGeom prst="ellipse">
@@ -4593,7 +4593,7 @@
           </p:nvSpPr>
           <p:spPr>
             <a:xfrm>
-              <a:off x="3976536" y="3456872"/>
+              <a:off x="2793964" y="4775923"/>
               <a:ext cx="49651" cy="49651"/>
             </a:xfrm>
             <a:prstGeom prst="ellipse">
@@ -4628,7 +4628,7 @@
           </p:nvSpPr>
           <p:spPr>
             <a:xfrm>
-              <a:off x="2793964" y="4775923"/>
+              <a:off x="3219167" y="4932441"/>
               <a:ext cx="49651" cy="49651"/>
             </a:xfrm>
             <a:prstGeom prst="ellipse">
@@ -4663,7 +4663,7 @@
           </p:nvSpPr>
           <p:spPr>
             <a:xfrm>
-              <a:off x="3219167" y="4932441"/>
+              <a:off x="4520232" y="4149900"/>
               <a:ext cx="49651" cy="49651"/>
             </a:xfrm>
             <a:prstGeom prst="ellipse">
@@ -4698,7 +4698,7 @@
           </p:nvSpPr>
           <p:spPr>
             <a:xfrm>
-              <a:off x="4520232" y="4149900"/>
+              <a:off x="5904013" y="4445833"/>
               <a:ext cx="49651" cy="49651"/>
             </a:xfrm>
             <a:prstGeom prst="ellipse">
@@ -4733,7 +4733,7 @@
           </p:nvSpPr>
           <p:spPr>
             <a:xfrm>
-              <a:off x="5904013" y="4445833"/>
+              <a:off x="2461779" y="4931623"/>
               <a:ext cx="49651" cy="49651"/>
             </a:xfrm>
             <a:prstGeom prst="ellipse">
@@ -4768,7 +4768,7 @@
           </p:nvSpPr>
           <p:spPr>
             <a:xfrm>
-              <a:off x="2461779" y="4931623"/>
+              <a:off x="3187423" y="4832592"/>
               <a:ext cx="49651" cy="49651"/>
             </a:xfrm>
             <a:prstGeom prst="ellipse">
@@ -4803,7 +4803,7 @@
           </p:nvSpPr>
           <p:spPr>
             <a:xfrm>
-              <a:off x="3187423" y="4832592"/>
+              <a:off x="2878757" y="4484041"/>
               <a:ext cx="49651" cy="49651"/>
             </a:xfrm>
             <a:prstGeom prst="ellipse">
@@ -4838,7 +4838,7 @@
           </p:nvSpPr>
           <p:spPr>
             <a:xfrm>
-              <a:off x="2878757" y="4484041"/>
+              <a:off x="2519258" y="5251806"/>
               <a:ext cx="49651" cy="49651"/>
             </a:xfrm>
             <a:prstGeom prst="ellipse">
@@ -4873,7 +4873,7 @@
           </p:nvSpPr>
           <p:spPr>
             <a:xfrm>
-              <a:off x="2519258" y="5251806"/>
+              <a:off x="4383131" y="4349796"/>
               <a:ext cx="49651" cy="49651"/>
             </a:xfrm>
             <a:prstGeom prst="ellipse">
@@ -4908,7 +4908,7 @@
           </p:nvSpPr>
           <p:spPr>
             <a:xfrm>
-              <a:off x="4383131" y="4349796"/>
+              <a:off x="2580442" y="5524381"/>
               <a:ext cx="49651" cy="49651"/>
             </a:xfrm>
             <a:prstGeom prst="ellipse">
@@ -4943,7 +4943,7 @@
           </p:nvSpPr>
           <p:spPr>
             <a:xfrm>
-              <a:off x="2580442" y="5524381"/>
+              <a:off x="3418347" y="4058540"/>
               <a:ext cx="49651" cy="49651"/>
             </a:xfrm>
             <a:prstGeom prst="ellipse">
@@ -4978,7 +4978,7 @@
           </p:nvSpPr>
           <p:spPr>
             <a:xfrm>
-              <a:off x="3418347" y="4058540"/>
+              <a:off x="3212797" y="3981333"/>
               <a:ext cx="49651" cy="49651"/>
             </a:xfrm>
             <a:prstGeom prst="ellipse">
@@ -5013,7 +5013,7 @@
           </p:nvSpPr>
           <p:spPr>
             <a:xfrm>
-              <a:off x="3212797" y="3981333"/>
+              <a:off x="4150306" y="4700185"/>
               <a:ext cx="49651" cy="49651"/>
             </a:xfrm>
             <a:prstGeom prst="ellipse">
@@ -5048,7 +5048,7 @@
           </p:nvSpPr>
           <p:spPr>
             <a:xfrm>
-              <a:off x="4150306" y="4700185"/>
+              <a:off x="3063242" y="5216709"/>
               <a:ext cx="49651" cy="49651"/>
             </a:xfrm>
             <a:prstGeom prst="ellipse">
@@ -5083,7 +5083,7 @@
           </p:nvSpPr>
           <p:spPr>
             <a:xfrm>
-              <a:off x="3063242" y="5216709"/>
+              <a:off x="1863438" y="4299826"/>
               <a:ext cx="49651" cy="49651"/>
             </a:xfrm>
             <a:prstGeom prst="ellipse">
@@ -5118,7 +5118,7 @@
           </p:nvSpPr>
           <p:spPr>
             <a:xfrm>
-              <a:off x="1863438" y="4299826"/>
+              <a:off x="2724950" y="5186370"/>
               <a:ext cx="49651" cy="49651"/>
             </a:xfrm>
             <a:prstGeom prst="ellipse">
@@ -5153,7 +5153,7 @@
           </p:nvSpPr>
           <p:spPr>
             <a:xfrm>
-              <a:off x="2724950" y="5186370"/>
+              <a:off x="4759174" y="4369012"/>
               <a:ext cx="49651" cy="49651"/>
             </a:xfrm>
             <a:prstGeom prst="ellipse">
@@ -5188,7 +5188,7 @@
           </p:nvSpPr>
           <p:spPr>
             <a:xfrm>
-              <a:off x="4759174" y="4369012"/>
+              <a:off x="4334805" y="3950134"/>
               <a:ext cx="49651" cy="49651"/>
             </a:xfrm>
             <a:prstGeom prst="ellipse">
@@ -5223,7 +5223,7 @@
           </p:nvSpPr>
           <p:spPr>
             <a:xfrm>
-              <a:off x="4334805" y="3950134"/>
+              <a:off x="4229130" y="4171259"/>
               <a:ext cx="49651" cy="49651"/>
             </a:xfrm>
             <a:prstGeom prst="ellipse">
@@ -5258,7 +5258,7 @@
           </p:nvSpPr>
           <p:spPr>
             <a:xfrm>
-              <a:off x="4229130" y="4171259"/>
+              <a:off x="3403458" y="4495810"/>
               <a:ext cx="49651" cy="49651"/>
             </a:xfrm>
             <a:prstGeom prst="ellipse">
@@ -5293,7 +5293,7 @@
           </p:nvSpPr>
           <p:spPr>
             <a:xfrm>
-              <a:off x="3403458" y="4495810"/>
+              <a:off x="2593819" y="4642912"/>
               <a:ext cx="49651" cy="49651"/>
             </a:xfrm>
             <a:prstGeom prst="ellipse">
@@ -5328,7 +5328,7 @@
           </p:nvSpPr>
           <p:spPr>
             <a:xfrm>
-              <a:off x="2593819" y="4642912"/>
+              <a:off x="4340203" y="3687010"/>
               <a:ext cx="49651" cy="49651"/>
             </a:xfrm>
             <a:prstGeom prst="ellipse">
@@ -5363,7 +5363,7 @@
           </p:nvSpPr>
           <p:spPr>
             <a:xfrm>
-              <a:off x="4340203" y="3687010"/>
+              <a:off x="3281711" y="4403215"/>
               <a:ext cx="49651" cy="49651"/>
             </a:xfrm>
             <a:prstGeom prst="ellipse">
@@ -5398,7 +5398,7 @@
           </p:nvSpPr>
           <p:spPr>
             <a:xfrm>
-              <a:off x="3281711" y="4403215"/>
+              <a:off x="3600921" y="5246686"/>
               <a:ext cx="49651" cy="49651"/>
             </a:xfrm>
             <a:prstGeom prst="ellipse">
@@ -5433,7 +5433,7 @@
           </p:nvSpPr>
           <p:spPr>
             <a:xfrm>
-              <a:off x="3600921" y="5246686"/>
+              <a:off x="3882362" y="4454483"/>
               <a:ext cx="49651" cy="49651"/>
             </a:xfrm>
             <a:prstGeom prst="ellipse">
@@ -5468,7 +5468,7 @@
           </p:nvSpPr>
           <p:spPr>
             <a:xfrm>
-              <a:off x="3882362" y="4454483"/>
+              <a:off x="4211687" y="5352216"/>
               <a:ext cx="49651" cy="49651"/>
             </a:xfrm>
             <a:prstGeom prst="ellipse">
@@ -5503,7 +5503,7 @@
           </p:nvSpPr>
           <p:spPr>
             <a:xfrm>
-              <a:off x="4211687" y="5352216"/>
+              <a:off x="2931704" y="4947064"/>
               <a:ext cx="49651" cy="49651"/>
             </a:xfrm>
             <a:prstGeom prst="ellipse">
@@ -5538,7 +5538,7 @@
           </p:nvSpPr>
           <p:spPr>
             <a:xfrm>
-              <a:off x="2931704" y="4947064"/>
+              <a:off x="2603202" y="4537735"/>
               <a:ext cx="49651" cy="49651"/>
             </a:xfrm>
             <a:prstGeom prst="ellipse">
@@ -5573,7 +5573,7 @@
           </p:nvSpPr>
           <p:spPr>
             <a:xfrm>
-              <a:off x="2603202" y="4537735"/>
+              <a:off x="3527478" y="5144097"/>
               <a:ext cx="49651" cy="49651"/>
             </a:xfrm>
             <a:prstGeom prst="ellipse">
@@ -5608,7 +5608,7 @@
           </p:nvSpPr>
           <p:spPr>
             <a:xfrm>
-              <a:off x="3527478" y="5144097"/>
+              <a:off x="2976327" y="4534072"/>
               <a:ext cx="49651" cy="49651"/>
             </a:xfrm>
             <a:prstGeom prst="ellipse">
@@ -5643,7 +5643,7 @@
           </p:nvSpPr>
           <p:spPr>
             <a:xfrm>
-              <a:off x="2976327" y="4534072"/>
+              <a:off x="3868083" y="3884761"/>
               <a:ext cx="49651" cy="49651"/>
             </a:xfrm>
             <a:prstGeom prst="ellipse">
@@ -5678,7 +5678,7 @@
           </p:nvSpPr>
           <p:spPr>
             <a:xfrm>
-              <a:off x="3868083" y="3884761"/>
+              <a:off x="2158976" y="3857991"/>
               <a:ext cx="49651" cy="49651"/>
             </a:xfrm>
             <a:prstGeom prst="ellipse">
@@ -5713,7 +5713,7 @@
           </p:nvSpPr>
           <p:spPr>
             <a:xfrm>
-              <a:off x="2158976" y="3857991"/>
+              <a:off x="2586458" y="5401751"/>
               <a:ext cx="49651" cy="49651"/>
             </a:xfrm>
             <a:prstGeom prst="ellipse">
@@ -5748,7 +5748,7 @@
           </p:nvSpPr>
           <p:spPr>
             <a:xfrm>
-              <a:off x="2586458" y="5401751"/>
+              <a:off x="2797684" y="5002640"/>
               <a:ext cx="49651" cy="49651"/>
             </a:xfrm>
             <a:prstGeom prst="ellipse">
@@ -5783,7 +5783,7 @@
           </p:nvSpPr>
           <p:spPr>
             <a:xfrm>
-              <a:off x="2797684" y="5002640"/>
+              <a:off x="2557490" y="5123265"/>
               <a:ext cx="49651" cy="49651"/>
             </a:xfrm>
             <a:prstGeom prst="ellipse">
@@ -5818,7 +5818,7 @@
           </p:nvSpPr>
           <p:spPr>
             <a:xfrm>
-              <a:off x="2557490" y="5123265"/>
+              <a:off x="4325280" y="4187576"/>
               <a:ext cx="49651" cy="49651"/>
             </a:xfrm>
             <a:prstGeom prst="ellipse">
@@ -5853,7 +5853,7 @@
           </p:nvSpPr>
           <p:spPr>
             <a:xfrm>
-              <a:off x="4325280" y="4187576"/>
+              <a:off x="3415664" y="4166656"/>
               <a:ext cx="49651" cy="49651"/>
             </a:xfrm>
             <a:prstGeom prst="ellipse">
@@ -5888,7 +5888,7 @@
           </p:nvSpPr>
           <p:spPr>
             <a:xfrm>
-              <a:off x="3415664" y="4166656"/>
+              <a:off x="2623493" y="5107206"/>
               <a:ext cx="49651" cy="49651"/>
             </a:xfrm>
             <a:prstGeom prst="ellipse">
@@ -5923,7 +5923,7 @@
           </p:nvSpPr>
           <p:spPr>
             <a:xfrm>
-              <a:off x="2623493" y="5107206"/>
+              <a:off x="4174146" y="4218465"/>
               <a:ext cx="49651" cy="49651"/>
             </a:xfrm>
             <a:prstGeom prst="ellipse">
@@ -5958,7 +5958,7 @@
           </p:nvSpPr>
           <p:spPr>
             <a:xfrm>
-              <a:off x="4174146" y="4218465"/>
+              <a:off x="3013824" y="4303724"/>
               <a:ext cx="49651" cy="49651"/>
             </a:xfrm>
             <a:prstGeom prst="ellipse">
@@ -5993,7 +5993,7 @@
           </p:nvSpPr>
           <p:spPr>
             <a:xfrm>
-              <a:off x="3013824" y="4303724"/>
+              <a:off x="2118506" y="5355399"/>
               <a:ext cx="49651" cy="49651"/>
             </a:xfrm>
             <a:prstGeom prst="ellipse">
@@ -6028,7 +6028,7 @@
           </p:nvSpPr>
           <p:spPr>
             <a:xfrm>
-              <a:off x="2118506" y="5355399"/>
+              <a:off x="2552509" y="5409570"/>
               <a:ext cx="49651" cy="49651"/>
             </a:xfrm>
             <a:prstGeom prst="ellipse">
@@ -6063,7 +6063,7 @@
           </p:nvSpPr>
           <p:spPr>
             <a:xfrm>
-              <a:off x="2552509" y="5409570"/>
+              <a:off x="4240252" y="5288071"/>
               <a:ext cx="49651" cy="49651"/>
             </a:xfrm>
             <a:prstGeom prst="ellipse">
@@ -6098,7 +6098,7 @@
           </p:nvSpPr>
           <p:spPr>
             <a:xfrm>
-              <a:off x="4240252" y="5288071"/>
+              <a:off x="4644320" y="4780833"/>
               <a:ext cx="49651" cy="49651"/>
             </a:xfrm>
             <a:prstGeom prst="ellipse">
@@ -6133,7 +6133,7 @@
           </p:nvSpPr>
           <p:spPr>
             <a:xfrm>
-              <a:off x="4644320" y="4780833"/>
+              <a:off x="6675946" y="4445833"/>
               <a:ext cx="49651" cy="49651"/>
             </a:xfrm>
             <a:prstGeom prst="ellipse">
@@ -6168,7 +6168,7 @@
           </p:nvSpPr>
           <p:spPr>
             <a:xfrm>
-              <a:off x="6675946" y="4445833"/>
+              <a:off x="3875287" y="4890110"/>
               <a:ext cx="49651" cy="49651"/>
             </a:xfrm>
             <a:prstGeom prst="ellipse">
@@ -6203,7 +6203,7 @@
           </p:nvSpPr>
           <p:spPr>
             <a:xfrm>
-              <a:off x="3875287" y="4890110"/>
+              <a:off x="4775922" y="2045672"/>
               <a:ext cx="49651" cy="49651"/>
             </a:xfrm>
             <a:prstGeom prst="ellipse">
@@ -6238,7 +6238,7 @@
           </p:nvSpPr>
           <p:spPr>
             <a:xfrm>
-              <a:off x="4775922" y="2045672"/>
+              <a:off x="2913507" y="4881211"/>
               <a:ext cx="49651" cy="49651"/>
             </a:xfrm>
             <a:prstGeom prst="ellipse">
@@ -6273,7 +6273,7 @@
           </p:nvSpPr>
           <p:spPr>
             <a:xfrm>
-              <a:off x="2913507" y="4881211"/>
+              <a:off x="4299268" y="4192905"/>
               <a:ext cx="49651" cy="49651"/>
             </a:xfrm>
             <a:prstGeom prst="ellipse">
@@ -6308,7 +6308,7 @@
           </p:nvSpPr>
           <p:spPr>
             <a:xfrm>
-              <a:off x="4299268" y="4192905"/>
+              <a:off x="2569534" y="4499796"/>
               <a:ext cx="49651" cy="49651"/>
             </a:xfrm>
             <a:prstGeom prst="ellipse">
@@ -6343,7 +6343,7 @@
           </p:nvSpPr>
           <p:spPr>
             <a:xfrm>
-              <a:off x="2569534" y="4499796"/>
+              <a:off x="5476763" y="3855548"/>
               <a:ext cx="49651" cy="49651"/>
             </a:xfrm>
             <a:prstGeom prst="ellipse">
@@ -6378,7 +6378,7 @@
           </p:nvSpPr>
           <p:spPr>
             <a:xfrm>
-              <a:off x="5476763" y="3855548"/>
+              <a:off x="3431471" y="4410928"/>
               <a:ext cx="49651" cy="49651"/>
             </a:xfrm>
             <a:prstGeom prst="ellipse">
@@ -6413,7 +6413,7 @@
           </p:nvSpPr>
           <p:spPr>
             <a:xfrm>
-              <a:off x="3431471" y="4410928"/>
+              <a:off x="3554821" y="4264387"/>
               <a:ext cx="49651" cy="49651"/>
             </a:xfrm>
             <a:prstGeom prst="ellipse">
@@ -6448,7 +6448,7 @@
           </p:nvSpPr>
           <p:spPr>
             <a:xfrm>
-              <a:off x="3554821" y="4264387"/>
+              <a:off x="4758976" y="3344681"/>
               <a:ext cx="49651" cy="49651"/>
             </a:xfrm>
             <a:prstGeom prst="ellipse">
@@ -6483,7 +6483,7 @@
           </p:nvSpPr>
           <p:spPr>
             <a:xfrm>
-              <a:off x="4758976" y="3344681"/>
+              <a:off x="5273166" y="4445833"/>
               <a:ext cx="49651" cy="49651"/>
             </a:xfrm>
             <a:prstGeom prst="ellipse">
@@ -6518,7 +6518,7 @@
           </p:nvSpPr>
           <p:spPr>
             <a:xfrm>
-              <a:off x="5273166" y="4445833"/>
+              <a:off x="4019583" y="3646555"/>
               <a:ext cx="49651" cy="49651"/>
             </a:xfrm>
             <a:prstGeom prst="ellipse">
@@ -6553,7 +6553,7 @@
           </p:nvSpPr>
           <p:spPr>
             <a:xfrm>
-              <a:off x="4019583" y="3646555"/>
+              <a:off x="4243443" y="4433986"/>
               <a:ext cx="49651" cy="49651"/>
             </a:xfrm>
             <a:prstGeom prst="ellipse">
@@ -6588,7 +6588,7 @@
           </p:nvSpPr>
           <p:spPr>
             <a:xfrm>
-              <a:off x="4243443" y="4433986"/>
+              <a:off x="4093208" y="4353195"/>
               <a:ext cx="49651" cy="49651"/>
             </a:xfrm>
             <a:prstGeom prst="ellipse">
@@ -6623,7 +6623,7 @@
           </p:nvSpPr>
           <p:spPr>
             <a:xfrm>
-              <a:off x="4093208" y="4353195"/>
+              <a:off x="4122794" y="4501817"/>
               <a:ext cx="49651" cy="49651"/>
             </a:xfrm>
             <a:prstGeom prst="ellipse">
@@ -6658,7 +6658,7 @@
           </p:nvSpPr>
           <p:spPr>
             <a:xfrm>
-              <a:off x="4122794" y="4501817"/>
+              <a:off x="2209753" y="4926349"/>
               <a:ext cx="49651" cy="49651"/>
             </a:xfrm>
             <a:prstGeom prst="ellipse">
@@ -6693,7 +6693,7 @@
           </p:nvSpPr>
           <p:spPr>
             <a:xfrm>
-              <a:off x="2209753" y="4926349"/>
+              <a:off x="3331802" y="4121146"/>
               <a:ext cx="49651" cy="49651"/>
             </a:xfrm>
             <a:prstGeom prst="ellipse">
@@ -6728,7 +6728,7 @@
           </p:nvSpPr>
           <p:spPr>
             <a:xfrm>
-              <a:off x="3331802" y="4121146"/>
+              <a:off x="3416857" y="4959254"/>
               <a:ext cx="49651" cy="49651"/>
             </a:xfrm>
             <a:prstGeom prst="ellipse">
@@ -6763,7 +6763,7 @@
           </p:nvSpPr>
           <p:spPr>
             <a:xfrm>
-              <a:off x="3416857" y="4959254"/>
+              <a:off x="6027229" y="4445833"/>
               <a:ext cx="49651" cy="49651"/>
             </a:xfrm>
             <a:prstGeom prst="ellipse">
@@ -6798,7 +6798,7 @@
           </p:nvSpPr>
           <p:spPr>
             <a:xfrm>
-              <a:off x="6027229" y="4445833"/>
+              <a:off x="5919685" y="4445833"/>
               <a:ext cx="49651" cy="49651"/>
             </a:xfrm>
             <a:prstGeom prst="ellipse">
@@ -6833,7 +6833,7 @@
           </p:nvSpPr>
           <p:spPr>
             <a:xfrm>
-              <a:off x="5919685" y="4445833"/>
+              <a:off x="6160233" y="3748356"/>
               <a:ext cx="49651" cy="49651"/>
             </a:xfrm>
             <a:prstGeom prst="ellipse">
@@ -6868,7 +6868,7 @@
           </p:nvSpPr>
           <p:spPr>
             <a:xfrm>
-              <a:off x="6160233" y="3748356"/>
+              <a:off x="4931984" y="4217579"/>
               <a:ext cx="49651" cy="49651"/>
             </a:xfrm>
             <a:prstGeom prst="ellipse">
@@ -6903,7 +6903,7 @@
           </p:nvSpPr>
           <p:spPr>
             <a:xfrm>
-              <a:off x="4931984" y="4217579"/>
+              <a:off x="3994553" y="4335002"/>
               <a:ext cx="49651" cy="49651"/>
             </a:xfrm>
             <a:prstGeom prst="ellipse">
@@ -6938,7 +6938,7 @@
           </p:nvSpPr>
           <p:spPr>
             <a:xfrm>
-              <a:off x="3994553" y="4335002"/>
+              <a:off x="5501007" y="3427490"/>
               <a:ext cx="49651" cy="49651"/>
             </a:xfrm>
             <a:prstGeom prst="ellipse">
@@ -6973,7 +6973,7 @@
           </p:nvSpPr>
           <p:spPr>
             <a:xfrm>
-              <a:off x="5501007" y="3427490"/>
+              <a:off x="3532390" y="4624715"/>
               <a:ext cx="49651" cy="49651"/>
             </a:xfrm>
             <a:prstGeom prst="ellipse">
@@ -7008,7 +7008,7 @@
           </p:nvSpPr>
           <p:spPr>
             <a:xfrm>
-              <a:off x="3532390" y="4624715"/>
+              <a:off x="4887315" y="4625159"/>
               <a:ext cx="49651" cy="49651"/>
             </a:xfrm>
             <a:prstGeom prst="ellipse">
@@ -7043,7 +7043,7 @@
           </p:nvSpPr>
           <p:spPr>
             <a:xfrm>
-              <a:off x="4887315" y="4625159"/>
+              <a:off x="4498660" y="3033369"/>
               <a:ext cx="49651" cy="49651"/>
             </a:xfrm>
             <a:prstGeom prst="ellipse">
@@ -7078,7 +7078,7 @@
           </p:nvSpPr>
           <p:spPr>
             <a:xfrm>
-              <a:off x="4498660" y="3033369"/>
+              <a:off x="2005923" y="4446898"/>
               <a:ext cx="49651" cy="49651"/>
             </a:xfrm>
             <a:prstGeom prst="ellipse">
@@ -7113,7 +7113,7 @@
           </p:nvSpPr>
           <p:spPr>
             <a:xfrm>
-              <a:off x="2005923" y="4446898"/>
+              <a:off x="2450423" y="4723173"/>
               <a:ext cx="49651" cy="49651"/>
             </a:xfrm>
             <a:prstGeom prst="ellipse">
@@ -7148,7 +7148,7 @@
           </p:nvSpPr>
           <p:spPr>
             <a:xfrm>
-              <a:off x="2450423" y="4723173"/>
+              <a:off x="5158328" y="2889224"/>
               <a:ext cx="49651" cy="49651"/>
             </a:xfrm>
             <a:prstGeom prst="ellipse">
@@ -7183,7 +7183,7 @@
           </p:nvSpPr>
           <p:spPr>
             <a:xfrm>
-              <a:off x="5158328" y="2889224"/>
+              <a:off x="7357762" y="3517888"/>
               <a:ext cx="49651" cy="49651"/>
             </a:xfrm>
             <a:prstGeom prst="ellipse">
@@ -7218,7 +7218,7 @@
           </p:nvSpPr>
           <p:spPr>
             <a:xfrm>
-              <a:off x="7357762" y="3517888"/>
+              <a:off x="3974829" y="3974488"/>
               <a:ext cx="49651" cy="49651"/>
             </a:xfrm>
             <a:prstGeom prst="ellipse">
@@ -7253,7 +7253,7 @@
           </p:nvSpPr>
           <p:spPr>
             <a:xfrm>
-              <a:off x="3974829" y="3974488"/>
+              <a:off x="2972040" y="4721398"/>
               <a:ext cx="49651" cy="49651"/>
             </a:xfrm>
             <a:prstGeom prst="ellipse">
@@ -7288,7 +7288,7 @@
           </p:nvSpPr>
           <p:spPr>
             <a:xfrm>
-              <a:off x="2972040" y="4721398"/>
+              <a:off x="4708023" y="3715943"/>
               <a:ext cx="49651" cy="49651"/>
             </a:xfrm>
             <a:prstGeom prst="ellipse">
@@ -7323,7 +7323,7 @@
           </p:nvSpPr>
           <p:spPr>
             <a:xfrm>
-              <a:off x="4708023" y="3715943"/>
+              <a:off x="4491273" y="4181122"/>
               <a:ext cx="49651" cy="49651"/>
             </a:xfrm>
             <a:prstGeom prst="ellipse">
@@ -7358,7 +7358,7 @@
           </p:nvSpPr>
           <p:spPr>
             <a:xfrm>
-              <a:off x="4491273" y="4181122"/>
+              <a:off x="6335350" y="4445833"/>
               <a:ext cx="49651" cy="49651"/>
             </a:xfrm>
             <a:prstGeom prst="ellipse">
@@ -7393,7 +7393,7 @@
           </p:nvSpPr>
           <p:spPr>
             <a:xfrm>
-              <a:off x="6335350" y="4445833"/>
+              <a:off x="2253350" y="3831071"/>
               <a:ext cx="49651" cy="49651"/>
             </a:xfrm>
             <a:prstGeom prst="ellipse">
@@ -7428,7 +7428,7 @@
           </p:nvSpPr>
           <p:spPr>
             <a:xfrm>
-              <a:off x="2253350" y="3831071"/>
+              <a:off x="3280909" y="3898825"/>
               <a:ext cx="49651" cy="49651"/>
             </a:xfrm>
             <a:prstGeom prst="ellipse">
@@ -7463,7 +7463,7 @@
           </p:nvSpPr>
           <p:spPr>
             <a:xfrm>
-              <a:off x="3280909" y="3898825"/>
+              <a:off x="4602983" y="5038214"/>
               <a:ext cx="49651" cy="49651"/>
             </a:xfrm>
             <a:prstGeom prst="ellipse">
@@ -7498,7 +7498,7 @@
           </p:nvSpPr>
           <p:spPr>
             <a:xfrm>
-              <a:off x="4602983" y="5038214"/>
+              <a:off x="4918939" y="4445833"/>
               <a:ext cx="49651" cy="49651"/>
             </a:xfrm>
             <a:prstGeom prst="ellipse">
@@ -7533,7 +7533,7 @@
           </p:nvSpPr>
           <p:spPr>
             <a:xfrm>
-              <a:off x="4918939" y="4445833"/>
+              <a:off x="3551300" y="3528419"/>
               <a:ext cx="49651" cy="49651"/>
             </a:xfrm>
             <a:prstGeom prst="ellipse">
@@ -7568,7 +7568,7 @@
           </p:nvSpPr>
           <p:spPr>
             <a:xfrm>
-              <a:off x="3551300" y="3528419"/>
+              <a:off x="1990333" y="4654316"/>
               <a:ext cx="49651" cy="49651"/>
             </a:xfrm>
             <a:prstGeom prst="ellipse">
@@ -7603,7 +7603,7 @@
           </p:nvSpPr>
           <p:spPr>
             <a:xfrm>
-              <a:off x="1990333" y="4654316"/>
+              <a:off x="2343281" y="5237120"/>
               <a:ext cx="49651" cy="49651"/>
             </a:xfrm>
             <a:prstGeom prst="ellipse">
@@ -7638,7 +7638,7 @@
           </p:nvSpPr>
           <p:spPr>
             <a:xfrm>
-              <a:off x="2343281" y="5237120"/>
+              <a:off x="8245197" y="4445833"/>
               <a:ext cx="49651" cy="49651"/>
             </a:xfrm>
             <a:prstGeom prst="ellipse">
@@ -7673,7 +7673,7 @@
           </p:nvSpPr>
           <p:spPr>
             <a:xfrm>
-              <a:off x="8245197" y="4445833"/>
+              <a:off x="2268595" y="3430954"/>
               <a:ext cx="49651" cy="49651"/>
             </a:xfrm>
             <a:prstGeom prst="ellipse">
@@ -7708,7 +7708,7 @@
           </p:nvSpPr>
           <p:spPr>
             <a:xfrm>
-              <a:off x="2268595" y="3430954"/>
+              <a:off x="2475229" y="4772366"/>
               <a:ext cx="49651" cy="49651"/>
             </a:xfrm>
             <a:prstGeom prst="ellipse">
@@ -7743,7 +7743,7 @@
           </p:nvSpPr>
           <p:spPr>
             <a:xfrm>
-              <a:off x="2475229" y="4772366"/>
+              <a:off x="3420777" y="5367467"/>
               <a:ext cx="49651" cy="49651"/>
             </a:xfrm>
             <a:prstGeom prst="ellipse">
@@ -7778,7 +7778,7 @@
           </p:nvSpPr>
           <p:spPr>
             <a:xfrm>
-              <a:off x="3420777" y="5367467"/>
+              <a:off x="5576795" y="3901318"/>
               <a:ext cx="49651" cy="49651"/>
             </a:xfrm>
             <a:prstGeom prst="ellipse">
@@ -7813,7 +7813,7 @@
           </p:nvSpPr>
           <p:spPr>
             <a:xfrm>
-              <a:off x="5576795" y="3901318"/>
+              <a:off x="3497693" y="4533276"/>
               <a:ext cx="49651" cy="49651"/>
             </a:xfrm>
             <a:prstGeom prst="ellipse">
@@ -7848,7 +7848,7 @@
           </p:nvSpPr>
           <p:spPr>
             <a:xfrm>
-              <a:off x="3497693" y="4533276"/>
+              <a:off x="4464655" y="4817603"/>
               <a:ext cx="49651" cy="49651"/>
             </a:xfrm>
             <a:prstGeom prst="ellipse">
@@ -7883,7 +7883,7 @@
           </p:nvSpPr>
           <p:spPr>
             <a:xfrm>
-              <a:off x="4464655" y="4817603"/>
+              <a:off x="2365613" y="4849148"/>
               <a:ext cx="49651" cy="49651"/>
             </a:xfrm>
             <a:prstGeom prst="ellipse">
@@ -7918,7 +7918,7 @@
           </p:nvSpPr>
           <p:spPr>
             <a:xfrm>
-              <a:off x="2365613" y="4849148"/>
+              <a:off x="3947306" y="4662134"/>
               <a:ext cx="49651" cy="49651"/>
             </a:xfrm>
             <a:prstGeom prst="ellipse">
@@ -7953,7 +7953,7 @@
           </p:nvSpPr>
           <p:spPr>
             <a:xfrm>
-              <a:off x="3947306" y="4662134"/>
+              <a:off x="6107720" y="4445833"/>
               <a:ext cx="49651" cy="49651"/>
             </a:xfrm>
             <a:prstGeom prst="ellipse">
@@ -7988,7 +7988,7 @@
           </p:nvSpPr>
           <p:spPr>
             <a:xfrm>
-              <a:off x="6107720" y="4445833"/>
+              <a:off x="6343137" y="4445833"/>
               <a:ext cx="49651" cy="49651"/>
             </a:xfrm>
             <a:prstGeom prst="ellipse">
@@ -8023,41 +8023,6 @@
           </p:nvSpPr>
           <p:spPr>
             <a:xfrm>
-              <a:off x="6343137" y="4445833"/>
-              <a:ext cx="49651" cy="49651"/>
-            </a:xfrm>
-            <a:prstGeom prst="ellipse">
-              <a:avLst/>
-            </a:prstGeom>
-            <a:solidFill>
-              <a:srgbClr val="000000">
-                <a:alpha val="29803"/>
-              </a:srgbClr>
-            </a:solidFill>
-            <a:ln w="9000" cap="rnd">
-              <a:solidFill>
-                <a:srgbClr val="000000">
-                  <a:alpha val="29803"/>
-                </a:srgbClr>
-              </a:solidFill>
-              <a:prstDash val="solid"/>
-              <a:round/>
-            </a:ln>
-          </p:spPr>
-          <p:txBody>
-            <a:bodyPr/>
-            <a:lstStyle/>
-            <a:p/>
-          </p:txBody>
-        </p:sp>
-        <p:sp>
-          <p:nvSpPr>
-            <p:cNvPr id="165" name="pt165"/>
-            <p:cNvSpPr/>
-            <p:nvPr/>
-          </p:nvSpPr>
-          <p:spPr>
-            <a:xfrm>
               <a:off x="4364410" y="3821105"/>
               <a:ext cx="49651" cy="49651"/>
             </a:xfrm>
@@ -8087,498 +8052,498 @@
         </p:sp>
         <p:sp>
           <p:nvSpPr>
-            <p:cNvPr id="166" name="pg166"/>
-            <p:cNvSpPr/>
-            <p:nvPr/>
-          </p:nvSpPr>
-          <p:spPr>
-            <a:xfrm>
-              <a:off x="1326279" y="3320091"/>
-              <a:ext cx="6943744" cy="1810732"/>
+            <p:cNvPr id="165" name="pg165"/>
+            <p:cNvSpPr/>
+            <p:nvPr/>
+          </p:nvSpPr>
+          <p:spPr>
+            <a:xfrm>
+              <a:off x="1326279" y="3312485"/>
+              <a:ext cx="6943744" cy="1830472"/>
             </a:xfrm>
             <a:custGeom>
               <a:avLst/>
               <a:pathLst>
-                <a:path w="6943744" h="1810732">
+                <a:path w="6943744" h="1830472">
                   <a:moveTo>
-                    <a:pt x="0" y="1438609"/>
+                    <a:pt x="0" y="1457742"/>
                   </a:moveTo>
                   <a:lnTo>
-                    <a:pt x="87895" y="1427516"/>
-                  </a:lnTo>
-                  <a:lnTo>
-                    <a:pt x="175790" y="1416378"/>
-                  </a:lnTo>
-                  <a:lnTo>
-                    <a:pt x="263686" y="1405188"/>
-                  </a:lnTo>
-                  <a:lnTo>
-                    <a:pt x="351581" y="1393943"/>
-                  </a:lnTo>
-                  <a:lnTo>
-                    <a:pt x="439477" y="1382637"/>
-                  </a:lnTo>
-                  <a:lnTo>
-                    <a:pt x="527372" y="1371264"/>
-                  </a:lnTo>
-                  <a:lnTo>
-                    <a:pt x="615268" y="1359817"/>
-                  </a:lnTo>
-                  <a:lnTo>
-                    <a:pt x="703163" y="1348288"/>
-                  </a:lnTo>
-                  <a:lnTo>
-                    <a:pt x="791059" y="1336670"/>
-                  </a:lnTo>
-                  <a:lnTo>
-                    <a:pt x="878954" y="1324951"/>
-                  </a:lnTo>
-                  <a:lnTo>
-                    <a:pt x="966850" y="1313121"/>
-                  </a:lnTo>
-                  <a:lnTo>
-                    <a:pt x="1054745" y="1301169"/>
-                  </a:lnTo>
-                  <a:lnTo>
-                    <a:pt x="1142641" y="1289081"/>
-                  </a:lnTo>
-                  <a:lnTo>
-                    <a:pt x="1230536" y="1276841"/>
-                  </a:lnTo>
-                  <a:lnTo>
-                    <a:pt x="1318432" y="1264432"/>
-                  </a:lnTo>
-                  <a:lnTo>
-                    <a:pt x="1406327" y="1251837"/>
-                  </a:lnTo>
-                  <a:lnTo>
-                    <a:pt x="1494223" y="1239035"/>
-                  </a:lnTo>
-                  <a:lnTo>
-                    <a:pt x="1582118" y="1226003"/>
-                  </a:lnTo>
-                  <a:lnTo>
-                    <a:pt x="1670014" y="1212719"/>
-                  </a:lnTo>
-                  <a:lnTo>
-                    <a:pt x="1757909" y="1199157"/>
-                  </a:lnTo>
-                  <a:lnTo>
-                    <a:pt x="1845805" y="1185293"/>
-                  </a:lnTo>
-                  <a:lnTo>
-                    <a:pt x="1933700" y="1171099"/>
-                  </a:lnTo>
-                  <a:lnTo>
-                    <a:pt x="2021596" y="1156553"/>
-                  </a:lnTo>
-                  <a:lnTo>
-                    <a:pt x="2109491" y="1141631"/>
-                  </a:lnTo>
-                  <a:lnTo>
-                    <a:pt x="2197387" y="1126313"/>
-                  </a:lnTo>
-                  <a:lnTo>
-                    <a:pt x="2285282" y="1110585"/>
-                  </a:lnTo>
-                  <a:lnTo>
-                    <a:pt x="2373178" y="1094435"/>
-                  </a:lnTo>
-                  <a:lnTo>
-                    <a:pt x="2461073" y="1077860"/>
-                  </a:lnTo>
-                  <a:lnTo>
-                    <a:pt x="2548969" y="1060862"/>
-                  </a:lnTo>
-                  <a:lnTo>
-                    <a:pt x="2636864" y="1043448"/>
-                  </a:lnTo>
-                  <a:lnTo>
-                    <a:pt x="2724760" y="1025633"/>
-                  </a:lnTo>
-                  <a:lnTo>
-                    <a:pt x="2812655" y="1007434"/>
-                  </a:lnTo>
-                  <a:lnTo>
-                    <a:pt x="2900551" y="988873"/>
-                  </a:lnTo>
-                  <a:lnTo>
-                    <a:pt x="2988446" y="969975"/>
-                  </a:lnTo>
-                  <a:lnTo>
-                    <a:pt x="3076342" y="950763"/>
-                  </a:lnTo>
-                  <a:lnTo>
-                    <a:pt x="3164237" y="931265"/>
-                  </a:lnTo>
-                  <a:lnTo>
-                    <a:pt x="3252133" y="911505"/>
-                  </a:lnTo>
-                  <a:lnTo>
-                    <a:pt x="3340028" y="891507"/>
-                  </a:lnTo>
-                  <a:lnTo>
-                    <a:pt x="3427924" y="871294"/>
-                  </a:lnTo>
-                  <a:lnTo>
-                    <a:pt x="3515819" y="850887"/>
-                  </a:lnTo>
-                  <a:lnTo>
-                    <a:pt x="3603715" y="830304"/>
-                  </a:lnTo>
-                  <a:lnTo>
-                    <a:pt x="3691610" y="809564"/>
-                  </a:lnTo>
-                  <a:lnTo>
-                    <a:pt x="3779506" y="788683"/>
-                  </a:lnTo>
-                  <a:lnTo>
-                    <a:pt x="3867401" y="767673"/>
-                  </a:lnTo>
-                  <a:lnTo>
-                    <a:pt x="3955297" y="746549"/>
-                  </a:lnTo>
-                  <a:lnTo>
-                    <a:pt x="4043192" y="725321"/>
-                  </a:lnTo>
-                  <a:lnTo>
-                    <a:pt x="4131088" y="703999"/>
-                  </a:lnTo>
-                  <a:lnTo>
-                    <a:pt x="4218983" y="682592"/>
-                  </a:lnTo>
-                  <a:lnTo>
-                    <a:pt x="4306879" y="661109"/>
-                  </a:lnTo>
-                  <a:lnTo>
-                    <a:pt x="4394774" y="639556"/>
-                  </a:lnTo>
-                  <a:lnTo>
-                    <a:pt x="4482670" y="617940"/>
-                  </a:lnTo>
-                  <a:lnTo>
-                    <a:pt x="4570565" y="596267"/>
-                  </a:lnTo>
-                  <a:lnTo>
-                    <a:pt x="4658461" y="574540"/>
-                  </a:lnTo>
-                  <a:lnTo>
-                    <a:pt x="4746356" y="552766"/>
-                  </a:lnTo>
-                  <a:lnTo>
-                    <a:pt x="4834252" y="530948"/>
-                  </a:lnTo>
-                  <a:lnTo>
-                    <a:pt x="4922147" y="509090"/>
-                  </a:lnTo>
-                  <a:lnTo>
-                    <a:pt x="5010043" y="487194"/>
-                  </a:lnTo>
-                  <a:lnTo>
-                    <a:pt x="5097938" y="465265"/>
-                  </a:lnTo>
-                  <a:lnTo>
-                    <a:pt x="5185834" y="443304"/>
-                  </a:lnTo>
-                  <a:lnTo>
-                    <a:pt x="5273729" y="421314"/>
-                  </a:lnTo>
-                  <a:lnTo>
-                    <a:pt x="5361625" y="399297"/>
-                  </a:lnTo>
-                  <a:lnTo>
-                    <a:pt x="5449520" y="377255"/>
-                  </a:lnTo>
-                  <a:lnTo>
-                    <a:pt x="5537416" y="355190"/>
-                  </a:lnTo>
-                  <a:lnTo>
-                    <a:pt x="5625311" y="333104"/>
-                  </a:lnTo>
-                  <a:lnTo>
-                    <a:pt x="5713207" y="310997"/>
-                  </a:lnTo>
-                  <a:lnTo>
-                    <a:pt x="5801102" y="288872"/>
-                  </a:lnTo>
-                  <a:lnTo>
-                    <a:pt x="5888998" y="266730"/>
-                  </a:lnTo>
-                  <a:lnTo>
-                    <a:pt x="5976893" y="244571"/>
-                  </a:lnTo>
-                  <a:lnTo>
-                    <a:pt x="6064789" y="222397"/>
-                  </a:lnTo>
-                  <a:lnTo>
-                    <a:pt x="6152684" y="200209"/>
-                  </a:lnTo>
-                  <a:lnTo>
-                    <a:pt x="6240580" y="178008"/>
-                  </a:lnTo>
-                  <a:lnTo>
-                    <a:pt x="6328475" y="155794"/>
-                  </a:lnTo>
-                  <a:lnTo>
-                    <a:pt x="6416371" y="133568"/>
-                  </a:lnTo>
-                  <a:lnTo>
-                    <a:pt x="6504266" y="111331"/>
-                  </a:lnTo>
-                  <a:lnTo>
-                    <a:pt x="6592162" y="89083"/>
-                  </a:lnTo>
-                  <a:lnTo>
-                    <a:pt x="6680057" y="66826"/>
-                  </a:lnTo>
-                  <a:lnTo>
-                    <a:pt x="6767953" y="44559"/>
-                  </a:lnTo>
-                  <a:lnTo>
-                    <a:pt x="6855848" y="22283"/>
+                    <a:pt x="87895" y="1446392"/>
+                  </a:lnTo>
+                  <a:lnTo>
+                    <a:pt x="175790" y="1434996"/>
+                  </a:lnTo>
+                  <a:lnTo>
+                    <a:pt x="263686" y="1423549"/>
+                  </a:lnTo>
+                  <a:lnTo>
+                    <a:pt x="351581" y="1412048"/>
+                  </a:lnTo>
+                  <a:lnTo>
+                    <a:pt x="439477" y="1400485"/>
+                  </a:lnTo>
+                  <a:lnTo>
+                    <a:pt x="527372" y="1388856"/>
+                  </a:lnTo>
+                  <a:lnTo>
+                    <a:pt x="615268" y="1377153"/>
+                  </a:lnTo>
+                  <a:lnTo>
+                    <a:pt x="703163" y="1365369"/>
+                  </a:lnTo>
+                  <a:lnTo>
+                    <a:pt x="791059" y="1353496"/>
+                  </a:lnTo>
+                  <a:lnTo>
+                    <a:pt x="878954" y="1341524"/>
+                  </a:lnTo>
+                  <a:lnTo>
+                    <a:pt x="966850" y="1329441"/>
+                  </a:lnTo>
+                  <a:lnTo>
+                    <a:pt x="1054745" y="1317237"/>
+                  </a:lnTo>
+                  <a:lnTo>
+                    <a:pt x="1142641" y="1304898"/>
+                  </a:lnTo>
+                  <a:lnTo>
+                    <a:pt x="1230536" y="1292408"/>
+                  </a:lnTo>
+                  <a:lnTo>
+                    <a:pt x="1318432" y="1279751"/>
+                  </a:lnTo>
+                  <a:lnTo>
+                    <a:pt x="1406327" y="1266909"/>
+                  </a:lnTo>
+                  <a:lnTo>
+                    <a:pt x="1494223" y="1253862"/>
+                  </a:lnTo>
+                  <a:lnTo>
+                    <a:pt x="1582118" y="1240587"/>
+                  </a:lnTo>
+                  <a:lnTo>
+                    <a:pt x="1670014" y="1227061"/>
+                  </a:lnTo>
+                  <a:lnTo>
+                    <a:pt x="1757909" y="1213260"/>
+                  </a:lnTo>
+                  <a:lnTo>
+                    <a:pt x="1845805" y="1199159"/>
+                  </a:lnTo>
+                  <a:lnTo>
+                    <a:pt x="1933700" y="1184731"/>
+                  </a:lnTo>
+                  <a:lnTo>
+                    <a:pt x="2021596" y="1169953"/>
+                  </a:lnTo>
+                  <a:lnTo>
+                    <a:pt x="2109491" y="1154801"/>
+                  </a:lnTo>
+                  <a:lnTo>
+                    <a:pt x="2197387" y="1139256"/>
+                  </a:lnTo>
+                  <a:lnTo>
+                    <a:pt x="2285282" y="1123302"/>
+                  </a:lnTo>
+                  <a:lnTo>
+                    <a:pt x="2373178" y="1106928"/>
+                  </a:lnTo>
+                  <a:lnTo>
+                    <a:pt x="2461073" y="1090130"/>
+                  </a:lnTo>
+                  <a:lnTo>
+                    <a:pt x="2548969" y="1072910"/>
+                  </a:lnTo>
+                  <a:lnTo>
+                    <a:pt x="2636864" y="1055275"/>
+                  </a:lnTo>
+                  <a:lnTo>
+                    <a:pt x="2724760" y="1037237"/>
+                  </a:lnTo>
+                  <a:lnTo>
+                    <a:pt x="2812655" y="1018815"/>
+                  </a:lnTo>
+                  <a:lnTo>
+                    <a:pt x="2900551" y="1000031"/>
+                  </a:lnTo>
+                  <a:lnTo>
+                    <a:pt x="2988446" y="980907"/>
+                  </a:lnTo>
+                  <a:lnTo>
+                    <a:pt x="3076342" y="961469"/>
+                  </a:lnTo>
+                  <a:lnTo>
+                    <a:pt x="3164237" y="941743"/>
+                  </a:lnTo>
+                  <a:lnTo>
+                    <a:pt x="3252133" y="921753"/>
+                  </a:lnTo>
+                  <a:lnTo>
+                    <a:pt x="3340028" y="901524"/>
+                  </a:lnTo>
+                  <a:lnTo>
+                    <a:pt x="3427924" y="881079"/>
+                  </a:lnTo>
+                  <a:lnTo>
+                    <a:pt x="3515819" y="860438"/>
+                  </a:lnTo>
+                  <a:lnTo>
+                    <a:pt x="3603715" y="839620"/>
+                  </a:lnTo>
+                  <a:lnTo>
+                    <a:pt x="3691610" y="818644"/>
+                  </a:lnTo>
+                  <a:lnTo>
+                    <a:pt x="3779506" y="797524"/>
+                  </a:lnTo>
+                  <a:lnTo>
+                    <a:pt x="3867401" y="776276"/>
+                  </a:lnTo>
+                  <a:lnTo>
+                    <a:pt x="3955297" y="754913"/>
+                  </a:lnTo>
+                  <a:lnTo>
+                    <a:pt x="4043192" y="733444"/>
+                  </a:lnTo>
+                  <a:lnTo>
+                    <a:pt x="4131088" y="711881"/>
+                  </a:lnTo>
+                  <a:lnTo>
+                    <a:pt x="4218983" y="690233"/>
+                  </a:lnTo>
+                  <a:lnTo>
+                    <a:pt x="4306879" y="668507"/>
+                  </a:lnTo>
+                  <a:lnTo>
+                    <a:pt x="4394774" y="646711"/>
+                  </a:lnTo>
+                  <a:lnTo>
+                    <a:pt x="4482670" y="624852"/>
+                  </a:lnTo>
+                  <a:lnTo>
+                    <a:pt x="4570565" y="602934"/>
+                  </a:lnTo>
+                  <a:lnTo>
+                    <a:pt x="4658461" y="580964"/>
+                  </a:lnTo>
+                  <a:lnTo>
+                    <a:pt x="4746356" y="558945"/>
+                  </a:lnTo>
+                  <a:lnTo>
+                    <a:pt x="4834252" y="536882"/>
+                  </a:lnTo>
+                  <a:lnTo>
+                    <a:pt x="4922147" y="514778"/>
+                  </a:lnTo>
+                  <a:lnTo>
+                    <a:pt x="5010043" y="492637"/>
+                  </a:lnTo>
+                  <a:lnTo>
+                    <a:pt x="5097938" y="470462"/>
+                  </a:lnTo>
+                  <a:lnTo>
+                    <a:pt x="5185834" y="448255"/>
+                  </a:lnTo>
+                  <a:lnTo>
+                    <a:pt x="5273729" y="426018"/>
+                  </a:lnTo>
+                  <a:lnTo>
+                    <a:pt x="5361625" y="403755"/>
+                  </a:lnTo>
+                  <a:lnTo>
+                    <a:pt x="5449520" y="381466"/>
+                  </a:lnTo>
+                  <a:lnTo>
+                    <a:pt x="5537416" y="359155"/>
+                  </a:lnTo>
+                  <a:lnTo>
+                    <a:pt x="5625311" y="336821"/>
+                  </a:lnTo>
+                  <a:lnTo>
+                    <a:pt x="5713207" y="314468"/>
+                  </a:lnTo>
+                  <a:lnTo>
+                    <a:pt x="5801102" y="292095"/>
+                  </a:lnTo>
+                  <a:lnTo>
+                    <a:pt x="5888998" y="269706"/>
+                  </a:lnTo>
+                  <a:lnTo>
+                    <a:pt x="5976893" y="247299"/>
+                  </a:lnTo>
+                  <a:lnTo>
+                    <a:pt x="6064789" y="224878"/>
+                  </a:lnTo>
+                  <a:lnTo>
+                    <a:pt x="6152684" y="202442"/>
+                  </a:lnTo>
+                  <a:lnTo>
+                    <a:pt x="6240580" y="179993"/>
+                  </a:lnTo>
+                  <a:lnTo>
+                    <a:pt x="6328475" y="157531"/>
+                  </a:lnTo>
+                  <a:lnTo>
+                    <a:pt x="6416371" y="135057"/>
+                  </a:lnTo>
+                  <a:lnTo>
+                    <a:pt x="6504266" y="112572"/>
+                  </a:lnTo>
+                  <a:lnTo>
+                    <a:pt x="6592162" y="90076"/>
+                  </a:lnTo>
+                  <a:lnTo>
+                    <a:pt x="6680057" y="67571"/>
+                  </a:lnTo>
+                  <a:lnTo>
+                    <a:pt x="6767953" y="45056"/>
+                  </a:lnTo>
+                  <a:lnTo>
+                    <a:pt x="6855848" y="22532"/>
                   </a:lnTo>
                   <a:lnTo>
                     <a:pt x="6943744" y="0"/>
                   </a:lnTo>
                   <a:lnTo>
-                    <a:pt x="6943744" y="651569"/>
-                  </a:lnTo>
-                  <a:lnTo>
-                    <a:pt x="6855848" y="662169"/>
-                  </a:lnTo>
-                  <a:lnTo>
-                    <a:pt x="6767953" y="672776"/>
-                  </a:lnTo>
-                  <a:lnTo>
-                    <a:pt x="6680057" y="683393"/>
-                  </a:lnTo>
-                  <a:lnTo>
-                    <a:pt x="6592162" y="694018"/>
-                  </a:lnTo>
-                  <a:lnTo>
-                    <a:pt x="6504266" y="704654"/>
-                  </a:lnTo>
-                  <a:lnTo>
-                    <a:pt x="6416371" y="715300"/>
-                  </a:lnTo>
-                  <a:lnTo>
-                    <a:pt x="6328475" y="725957"/>
-                  </a:lnTo>
-                  <a:lnTo>
-                    <a:pt x="6240580" y="736627"/>
-                  </a:lnTo>
-                  <a:lnTo>
-                    <a:pt x="6152684" y="747308"/>
-                  </a:lnTo>
-                  <a:lnTo>
-                    <a:pt x="6064789" y="758003"/>
-                  </a:lnTo>
-                  <a:lnTo>
-                    <a:pt x="5976893" y="768713"/>
-                  </a:lnTo>
-                  <a:lnTo>
-                    <a:pt x="5888998" y="779437"/>
-                  </a:lnTo>
-                  <a:lnTo>
-                    <a:pt x="5801102" y="790178"/>
-                  </a:lnTo>
-                  <a:lnTo>
-                    <a:pt x="5713207" y="800936"/>
-                  </a:lnTo>
-                  <a:lnTo>
-                    <a:pt x="5625311" y="811713"/>
-                  </a:lnTo>
-                  <a:lnTo>
-                    <a:pt x="5537416" y="822510"/>
-                  </a:lnTo>
-                  <a:lnTo>
-                    <a:pt x="5449520" y="833328"/>
-                  </a:lnTo>
-                  <a:lnTo>
-                    <a:pt x="5361625" y="844169"/>
-                  </a:lnTo>
-                  <a:lnTo>
-                    <a:pt x="5273729" y="855036"/>
-                  </a:lnTo>
-                  <a:lnTo>
-                    <a:pt x="5185834" y="865929"/>
-                  </a:lnTo>
-                  <a:lnTo>
-                    <a:pt x="5097938" y="876851"/>
-                  </a:lnTo>
-                  <a:lnTo>
-                    <a:pt x="5010043" y="887805"/>
-                  </a:lnTo>
-                  <a:lnTo>
-                    <a:pt x="4922147" y="898792"/>
-                  </a:lnTo>
-                  <a:lnTo>
-                    <a:pt x="4834252" y="909817"/>
-                  </a:lnTo>
-                  <a:lnTo>
-                    <a:pt x="4746356" y="920882"/>
-                  </a:lnTo>
-                  <a:lnTo>
-                    <a:pt x="4658461" y="931991"/>
-                  </a:lnTo>
-                  <a:lnTo>
-                    <a:pt x="4570565" y="943148"/>
-                  </a:lnTo>
-                  <a:lnTo>
-                    <a:pt x="4482670" y="954358"/>
-                  </a:lnTo>
-                  <a:lnTo>
-                    <a:pt x="4394774" y="965625"/>
-                  </a:lnTo>
-                  <a:lnTo>
-                    <a:pt x="4306879" y="976955"/>
-                  </a:lnTo>
-                  <a:lnTo>
-                    <a:pt x="4218983" y="988355"/>
-                  </a:lnTo>
-                  <a:lnTo>
-                    <a:pt x="4131088" y="999832"/>
-                  </a:lnTo>
-                  <a:lnTo>
-                    <a:pt x="4043192" y="1011393"/>
-                  </a:lnTo>
-                  <a:lnTo>
-                    <a:pt x="3955297" y="1023048"/>
-                  </a:lnTo>
-                  <a:lnTo>
-                    <a:pt x="3867401" y="1034807"/>
-                  </a:lnTo>
-                  <a:lnTo>
-                    <a:pt x="3779506" y="1046681"/>
-                  </a:lnTo>
-                  <a:lnTo>
-                    <a:pt x="3691610" y="1058682"/>
-                  </a:lnTo>
-                  <a:lnTo>
-                    <a:pt x="3603715" y="1070825"/>
-                  </a:lnTo>
-                  <a:lnTo>
-                    <a:pt x="3515819" y="1083126"/>
-                  </a:lnTo>
-                  <a:lnTo>
-                    <a:pt x="3427924" y="1095602"/>
-                  </a:lnTo>
-                  <a:lnTo>
-                    <a:pt x="3340028" y="1108272"/>
-                  </a:lnTo>
-                  <a:lnTo>
-                    <a:pt x="3252133" y="1121157"/>
-                  </a:lnTo>
-                  <a:lnTo>
-                    <a:pt x="3164237" y="1134281"/>
-                  </a:lnTo>
-                  <a:lnTo>
-                    <a:pt x="3076342" y="1147666"/>
-                  </a:lnTo>
-                  <a:lnTo>
-                    <a:pt x="2988446" y="1161337"/>
-                  </a:lnTo>
-                  <a:lnTo>
-                    <a:pt x="2900551" y="1175322"/>
-                  </a:lnTo>
-                  <a:lnTo>
-                    <a:pt x="2812655" y="1189644"/>
-                  </a:lnTo>
-                  <a:lnTo>
-                    <a:pt x="2724760" y="1204329"/>
-                  </a:lnTo>
-                  <a:lnTo>
-                    <a:pt x="2636864" y="1219397"/>
-                  </a:lnTo>
-                  <a:lnTo>
-                    <a:pt x="2548969" y="1234866"/>
-                  </a:lnTo>
-                  <a:lnTo>
-                    <a:pt x="2461073" y="1250751"/>
-                  </a:lnTo>
-                  <a:lnTo>
-                    <a:pt x="2373178" y="1267059"/>
-                  </a:lnTo>
-                  <a:lnTo>
-                    <a:pt x="2285282" y="1283793"/>
-                  </a:lnTo>
-                  <a:lnTo>
-                    <a:pt x="2197387" y="1300948"/>
-                  </a:lnTo>
-                  <a:lnTo>
-                    <a:pt x="2109491" y="1318513"/>
-                  </a:lnTo>
-                  <a:lnTo>
-                    <a:pt x="2021596" y="1336474"/>
-                  </a:lnTo>
-                  <a:lnTo>
-                    <a:pt x="1933700" y="1354811"/>
-                  </a:lnTo>
-                  <a:lnTo>
-                    <a:pt x="1845805" y="1373501"/>
-                  </a:lnTo>
-                  <a:lnTo>
-                    <a:pt x="1757909" y="1392519"/>
-                  </a:lnTo>
-                  <a:lnTo>
-                    <a:pt x="1670014" y="1411841"/>
-                  </a:lnTo>
-                  <a:lnTo>
-                    <a:pt x="1582118" y="1431440"/>
-                  </a:lnTo>
-                  <a:lnTo>
-                    <a:pt x="1494223" y="1451291"/>
-                  </a:lnTo>
-                  <a:lnTo>
-                    <a:pt x="1406327" y="1471372"/>
-                  </a:lnTo>
-                  <a:lnTo>
-                    <a:pt x="1318432" y="1491660"/>
-                  </a:lnTo>
-                  <a:lnTo>
-                    <a:pt x="1230536" y="1512135"/>
-                  </a:lnTo>
-                  <a:lnTo>
-                    <a:pt x="1142641" y="1532778"/>
-                  </a:lnTo>
-                  <a:lnTo>
-                    <a:pt x="1054745" y="1553573"/>
-                  </a:lnTo>
-                  <a:lnTo>
-                    <a:pt x="966850" y="1574504"/>
-                  </a:lnTo>
-                  <a:lnTo>
-                    <a:pt x="878954" y="1595558"/>
-                  </a:lnTo>
-                  <a:lnTo>
-                    <a:pt x="791059" y="1616722"/>
-                  </a:lnTo>
-                  <a:lnTo>
-                    <a:pt x="703163" y="1637986"/>
-                  </a:lnTo>
-                  <a:lnTo>
-                    <a:pt x="615268" y="1659341"/>
-                  </a:lnTo>
-                  <a:lnTo>
-                    <a:pt x="527372" y="1680777"/>
-                  </a:lnTo>
-                  <a:lnTo>
-                    <a:pt x="439477" y="1702287"/>
-                  </a:lnTo>
-                  <a:lnTo>
-                    <a:pt x="351581" y="1723864"/>
-                  </a:lnTo>
-                  <a:lnTo>
-                    <a:pt x="263686" y="1745502"/>
-                  </a:lnTo>
-                  <a:lnTo>
-                    <a:pt x="175790" y="1767196"/>
-                  </a:lnTo>
-                  <a:lnTo>
-                    <a:pt x="87895" y="1788941"/>
-                  </a:lnTo>
-                  <a:lnTo>
-                    <a:pt x="0" y="1810732"/>
+                    <a:pt x="6943744" y="650228"/>
+                  </a:lnTo>
+                  <a:lnTo>
+                    <a:pt x="6855848" y="661088"/>
+                  </a:lnTo>
+                  <a:lnTo>
+                    <a:pt x="6767953" y="671956"/>
+                  </a:lnTo>
+                  <a:lnTo>
+                    <a:pt x="6680057" y="682833"/>
+                  </a:lnTo>
+                  <a:lnTo>
+                    <a:pt x="6592162" y="693720"/>
+                  </a:lnTo>
+                  <a:lnTo>
+                    <a:pt x="6504266" y="704617"/>
+                  </a:lnTo>
+                  <a:lnTo>
+                    <a:pt x="6416371" y="715524"/>
+                  </a:lnTo>
+                  <a:lnTo>
+                    <a:pt x="6328475" y="726442"/>
+                  </a:lnTo>
+                  <a:lnTo>
+                    <a:pt x="6240580" y="737372"/>
+                  </a:lnTo>
+                  <a:lnTo>
+                    <a:pt x="6152684" y="748315"/>
+                  </a:lnTo>
+                  <a:lnTo>
+                    <a:pt x="6064789" y="759272"/>
+                  </a:lnTo>
+                  <a:lnTo>
+                    <a:pt x="5976893" y="770242"/>
+                  </a:lnTo>
+                  <a:lnTo>
+                    <a:pt x="5888998" y="781228"/>
+                  </a:lnTo>
+                  <a:lnTo>
+                    <a:pt x="5801102" y="792231"/>
+                  </a:lnTo>
+                  <a:lnTo>
+                    <a:pt x="5713207" y="803251"/>
+                  </a:lnTo>
+                  <a:lnTo>
+                    <a:pt x="5625311" y="814290"/>
+                  </a:lnTo>
+                  <a:lnTo>
+                    <a:pt x="5537416" y="825348"/>
+                  </a:lnTo>
+                  <a:lnTo>
+                    <a:pt x="5449520" y="836429"/>
+                  </a:lnTo>
+                  <a:lnTo>
+                    <a:pt x="5361625" y="847533"/>
+                  </a:lnTo>
+                  <a:lnTo>
+                    <a:pt x="5273729" y="858661"/>
+                  </a:lnTo>
+                  <a:lnTo>
+                    <a:pt x="5185834" y="869817"/>
+                  </a:lnTo>
+                  <a:lnTo>
+                    <a:pt x="5097938" y="881002"/>
+                  </a:lnTo>
+                  <a:lnTo>
+                    <a:pt x="5010043" y="892219"/>
+                  </a:lnTo>
+                  <a:lnTo>
+                    <a:pt x="4922147" y="903470"/>
+                  </a:lnTo>
+                  <a:lnTo>
+                    <a:pt x="4834252" y="914759"/>
+                  </a:lnTo>
+                  <a:lnTo>
+                    <a:pt x="4746356" y="926088"/>
+                  </a:lnTo>
+                  <a:lnTo>
+                    <a:pt x="4658461" y="937461"/>
+                  </a:lnTo>
+                  <a:lnTo>
+                    <a:pt x="4570565" y="948883"/>
+                  </a:lnTo>
+                  <a:lnTo>
+                    <a:pt x="4482670" y="960358"/>
+                  </a:lnTo>
+                  <a:lnTo>
+                    <a:pt x="4394774" y="971890"/>
+                  </a:lnTo>
+                  <a:lnTo>
+                    <a:pt x="4306879" y="983487"/>
+                  </a:lnTo>
+                  <a:lnTo>
+                    <a:pt x="4218983" y="995154"/>
+                  </a:lnTo>
+                  <a:lnTo>
+                    <a:pt x="4131088" y="1006897"/>
+                  </a:lnTo>
+                  <a:lnTo>
+                    <a:pt x="4043192" y="1018727"/>
+                  </a:lnTo>
+                  <a:lnTo>
+                    <a:pt x="3955297" y="1030651"/>
+                  </a:lnTo>
+                  <a:lnTo>
+                    <a:pt x="3867401" y="1042679"/>
+                  </a:lnTo>
+                  <a:lnTo>
+                    <a:pt x="3779506" y="1054823"/>
+                  </a:lnTo>
+                  <a:lnTo>
+                    <a:pt x="3691610" y="1067096"/>
+                  </a:lnTo>
+                  <a:lnTo>
+                    <a:pt x="3603715" y="1079512"/>
+                  </a:lnTo>
+                  <a:lnTo>
+                    <a:pt x="3515819" y="1092087"/>
+                  </a:lnTo>
+                  <a:lnTo>
+                    <a:pt x="3427924" y="1104838"/>
+                  </a:lnTo>
+                  <a:lnTo>
+                    <a:pt x="3340028" y="1117784"/>
+                  </a:lnTo>
+                  <a:lnTo>
+                    <a:pt x="3252133" y="1130948"/>
+                  </a:lnTo>
+                  <a:lnTo>
+                    <a:pt x="3164237" y="1144350"/>
+                  </a:lnTo>
+                  <a:lnTo>
+                    <a:pt x="3076342" y="1158016"/>
+                  </a:lnTo>
+                  <a:lnTo>
+                    <a:pt x="2988446" y="1171971"/>
+                  </a:lnTo>
+                  <a:lnTo>
+                    <a:pt x="2900551" y="1186239"/>
+                  </a:lnTo>
+                  <a:lnTo>
+                    <a:pt x="2812655" y="1200847"/>
+                  </a:lnTo>
+                  <a:lnTo>
+                    <a:pt x="2724760" y="1215817"/>
+                  </a:lnTo>
+                  <a:lnTo>
+                    <a:pt x="2636864" y="1231172"/>
+                  </a:lnTo>
+                  <a:lnTo>
+                    <a:pt x="2548969" y="1246929"/>
+                  </a:lnTo>
+                  <a:lnTo>
+                    <a:pt x="2461073" y="1263100"/>
+                  </a:lnTo>
+                  <a:lnTo>
+                    <a:pt x="2373178" y="1279695"/>
+                  </a:lnTo>
+                  <a:lnTo>
+                    <a:pt x="2285282" y="1296714"/>
+                  </a:lnTo>
+                  <a:lnTo>
+                    <a:pt x="2197387" y="1314152"/>
+                  </a:lnTo>
+                  <a:lnTo>
+                    <a:pt x="2109491" y="1331999"/>
+                  </a:lnTo>
+                  <a:lnTo>
+                    <a:pt x="2021596" y="1350239"/>
+                  </a:lnTo>
+                  <a:lnTo>
+                    <a:pt x="1933700" y="1368853"/>
+                  </a:lnTo>
+                  <a:lnTo>
+                    <a:pt x="1845805" y="1387818"/>
+                  </a:lnTo>
+                  <a:lnTo>
+                    <a:pt x="1757909" y="1407108"/>
+                  </a:lnTo>
+                  <a:lnTo>
+                    <a:pt x="1670014" y="1426700"/>
+                  </a:lnTo>
+                  <a:lnTo>
+                    <a:pt x="1582118" y="1446566"/>
+                  </a:lnTo>
+                  <a:lnTo>
+                    <a:pt x="1494223" y="1466684"/>
+                  </a:lnTo>
+                  <a:lnTo>
+                    <a:pt x="1406327" y="1487028"/>
+                  </a:lnTo>
+                  <a:lnTo>
+                    <a:pt x="1318432" y="1507579"/>
+                  </a:lnTo>
+                  <a:lnTo>
+                    <a:pt x="1230536" y="1528314"/>
+                  </a:lnTo>
+                  <a:lnTo>
+                    <a:pt x="1142641" y="1549217"/>
+                  </a:lnTo>
+                  <a:lnTo>
+                    <a:pt x="1054745" y="1570269"/>
+                  </a:lnTo>
+                  <a:lnTo>
+                    <a:pt x="966850" y="1591457"/>
+                  </a:lnTo>
+                  <a:lnTo>
+                    <a:pt x="878954" y="1612767"/>
+                  </a:lnTo>
+                  <a:lnTo>
+                    <a:pt x="791059" y="1634187"/>
+                  </a:lnTo>
+                  <a:lnTo>
+                    <a:pt x="703163" y="1655706"/>
+                  </a:lnTo>
+                  <a:lnTo>
+                    <a:pt x="615268" y="1677314"/>
+                  </a:lnTo>
+                  <a:lnTo>
+                    <a:pt x="527372" y="1699004"/>
+                  </a:lnTo>
+                  <a:lnTo>
+                    <a:pt x="439477" y="1720767"/>
+                  </a:lnTo>
+                  <a:lnTo>
+                    <a:pt x="351581" y="1742597"/>
+                  </a:lnTo>
+                  <a:lnTo>
+                    <a:pt x="263686" y="1764487"/>
+                  </a:lnTo>
+                  <a:lnTo>
+                    <a:pt x="175790" y="1786433"/>
+                  </a:lnTo>
+                  <a:lnTo>
+                    <a:pt x="87895" y="1808429"/>
+                  </a:lnTo>
+                  <a:lnTo>
+                    <a:pt x="0" y="1830472"/>
                   </a:lnTo>
                   <a:close/>
                 </a:path>
@@ -8598,255 +8563,255 @@
         </p:sp>
         <p:sp>
           <p:nvSpPr>
-            <p:cNvPr id="167" name="pl167"/>
-            <p:cNvSpPr/>
-            <p:nvPr/>
-          </p:nvSpPr>
-          <p:spPr>
-            <a:xfrm>
-              <a:off x="1326279" y="3320091"/>
-              <a:ext cx="6943744" cy="1438609"/>
+            <p:cNvPr id="166" name="pl166"/>
+            <p:cNvSpPr/>
+            <p:nvPr/>
+          </p:nvSpPr>
+          <p:spPr>
+            <a:xfrm>
+              <a:off x="1326279" y="3312485"/>
+              <a:ext cx="6943744" cy="1457742"/>
             </a:xfrm>
             <a:custGeom>
               <a:avLst/>
               <a:pathLst>
-                <a:path w="6943744" h="1438609">
+                <a:path w="6943744" h="1457742">
                   <a:moveTo>
-                    <a:pt x="0" y="1438609"/>
+                    <a:pt x="0" y="1457742"/>
                   </a:moveTo>
                   <a:lnTo>
-                    <a:pt x="87895" y="1427516"/>
-                  </a:lnTo>
-                  <a:lnTo>
-                    <a:pt x="175790" y="1416378"/>
-                  </a:lnTo>
-                  <a:lnTo>
-                    <a:pt x="263686" y="1405188"/>
-                  </a:lnTo>
-                  <a:lnTo>
-                    <a:pt x="351581" y="1393943"/>
-                  </a:lnTo>
-                  <a:lnTo>
-                    <a:pt x="439477" y="1382637"/>
-                  </a:lnTo>
-                  <a:lnTo>
-                    <a:pt x="527372" y="1371264"/>
-                  </a:lnTo>
-                  <a:lnTo>
-                    <a:pt x="615268" y="1359817"/>
-                  </a:lnTo>
-                  <a:lnTo>
-                    <a:pt x="703163" y="1348288"/>
-                  </a:lnTo>
-                  <a:lnTo>
-                    <a:pt x="791059" y="1336670"/>
-                  </a:lnTo>
-                  <a:lnTo>
-                    <a:pt x="878954" y="1324951"/>
-                  </a:lnTo>
-                  <a:lnTo>
-                    <a:pt x="966850" y="1313121"/>
-                  </a:lnTo>
-                  <a:lnTo>
-                    <a:pt x="1054745" y="1301169"/>
-                  </a:lnTo>
-                  <a:lnTo>
-                    <a:pt x="1142641" y="1289081"/>
-                  </a:lnTo>
-                  <a:lnTo>
-                    <a:pt x="1230536" y="1276841"/>
-                  </a:lnTo>
-                  <a:lnTo>
-                    <a:pt x="1318432" y="1264432"/>
-                  </a:lnTo>
-                  <a:lnTo>
-                    <a:pt x="1406327" y="1251837"/>
-                  </a:lnTo>
-                  <a:lnTo>
-                    <a:pt x="1494223" y="1239035"/>
-                  </a:lnTo>
-                  <a:lnTo>
-                    <a:pt x="1582118" y="1226003"/>
-                  </a:lnTo>
-                  <a:lnTo>
-                    <a:pt x="1670014" y="1212719"/>
-                  </a:lnTo>
-                  <a:lnTo>
-                    <a:pt x="1757909" y="1199157"/>
-                  </a:lnTo>
-                  <a:lnTo>
-                    <a:pt x="1845805" y="1185293"/>
-                  </a:lnTo>
-                  <a:lnTo>
-                    <a:pt x="1933700" y="1171099"/>
-                  </a:lnTo>
-                  <a:lnTo>
-                    <a:pt x="2021596" y="1156553"/>
-                  </a:lnTo>
-                  <a:lnTo>
-                    <a:pt x="2109491" y="1141631"/>
-                  </a:lnTo>
-                  <a:lnTo>
-                    <a:pt x="2197387" y="1126313"/>
-                  </a:lnTo>
-                  <a:lnTo>
-                    <a:pt x="2285282" y="1110585"/>
-                  </a:lnTo>
-                  <a:lnTo>
-                    <a:pt x="2373178" y="1094435"/>
-                  </a:lnTo>
-                  <a:lnTo>
-                    <a:pt x="2461073" y="1077860"/>
-                  </a:lnTo>
-                  <a:lnTo>
-                    <a:pt x="2548969" y="1060862"/>
-                  </a:lnTo>
-                  <a:lnTo>
-                    <a:pt x="2636864" y="1043448"/>
-                  </a:lnTo>
-                  <a:lnTo>
-                    <a:pt x="2724760" y="1025633"/>
-                  </a:lnTo>
-                  <a:lnTo>
-                    <a:pt x="2812655" y="1007434"/>
-                  </a:lnTo>
-                  <a:lnTo>
-                    <a:pt x="2900551" y="988873"/>
-                  </a:lnTo>
-                  <a:lnTo>
-                    <a:pt x="2988446" y="969975"/>
-                  </a:lnTo>
-                  <a:lnTo>
-                    <a:pt x="3076342" y="950763"/>
-                  </a:lnTo>
-                  <a:lnTo>
-                    <a:pt x="3164237" y="931265"/>
-                  </a:lnTo>
-                  <a:lnTo>
-                    <a:pt x="3252133" y="911505"/>
-                  </a:lnTo>
-                  <a:lnTo>
-                    <a:pt x="3340028" y="891507"/>
-                  </a:lnTo>
-                  <a:lnTo>
-                    <a:pt x="3427924" y="871294"/>
-                  </a:lnTo>
-                  <a:lnTo>
-                    <a:pt x="3515819" y="850887"/>
-                  </a:lnTo>
-                  <a:lnTo>
-                    <a:pt x="3603715" y="830304"/>
-                  </a:lnTo>
-                  <a:lnTo>
-                    <a:pt x="3691610" y="809564"/>
-                  </a:lnTo>
-                  <a:lnTo>
-                    <a:pt x="3779506" y="788683"/>
-                  </a:lnTo>
-                  <a:lnTo>
-                    <a:pt x="3867401" y="767673"/>
-                  </a:lnTo>
-                  <a:lnTo>
-                    <a:pt x="3955297" y="746549"/>
-                  </a:lnTo>
-                  <a:lnTo>
-                    <a:pt x="4043192" y="725321"/>
-                  </a:lnTo>
-                  <a:lnTo>
-                    <a:pt x="4131088" y="703999"/>
-                  </a:lnTo>
-                  <a:lnTo>
-                    <a:pt x="4218983" y="682592"/>
-                  </a:lnTo>
-                  <a:lnTo>
-                    <a:pt x="4306879" y="661109"/>
-                  </a:lnTo>
-                  <a:lnTo>
-                    <a:pt x="4394774" y="639556"/>
-                  </a:lnTo>
-                  <a:lnTo>
-                    <a:pt x="4482670" y="617940"/>
-                  </a:lnTo>
-                  <a:lnTo>
-                    <a:pt x="4570565" y="596267"/>
-                  </a:lnTo>
-                  <a:lnTo>
-                    <a:pt x="4658461" y="574540"/>
-                  </a:lnTo>
-                  <a:lnTo>
-                    <a:pt x="4746356" y="552766"/>
-                  </a:lnTo>
-                  <a:lnTo>
-                    <a:pt x="4834252" y="530948"/>
-                  </a:lnTo>
-                  <a:lnTo>
-                    <a:pt x="4922147" y="509090"/>
-                  </a:lnTo>
-                  <a:lnTo>
-                    <a:pt x="5010043" y="487194"/>
-                  </a:lnTo>
-                  <a:lnTo>
-                    <a:pt x="5097938" y="465265"/>
-                  </a:lnTo>
-                  <a:lnTo>
-                    <a:pt x="5185834" y="443304"/>
-                  </a:lnTo>
-                  <a:lnTo>
-                    <a:pt x="5273729" y="421314"/>
-                  </a:lnTo>
-                  <a:lnTo>
-                    <a:pt x="5361625" y="399297"/>
-                  </a:lnTo>
-                  <a:lnTo>
-                    <a:pt x="5449520" y="377255"/>
-                  </a:lnTo>
-                  <a:lnTo>
-                    <a:pt x="5537416" y="355190"/>
-                  </a:lnTo>
-                  <a:lnTo>
-                    <a:pt x="5625311" y="333104"/>
-                  </a:lnTo>
-                  <a:lnTo>
-                    <a:pt x="5713207" y="310997"/>
-                  </a:lnTo>
-                  <a:lnTo>
-                    <a:pt x="5801102" y="288872"/>
-                  </a:lnTo>
-                  <a:lnTo>
-                    <a:pt x="5888998" y="266730"/>
-                  </a:lnTo>
-                  <a:lnTo>
-                    <a:pt x="5976893" y="244571"/>
-                  </a:lnTo>
-                  <a:lnTo>
-                    <a:pt x="6064789" y="222397"/>
-                  </a:lnTo>
-                  <a:lnTo>
-                    <a:pt x="6152684" y="200209"/>
-                  </a:lnTo>
-                  <a:lnTo>
-                    <a:pt x="6240580" y="178008"/>
-                  </a:lnTo>
-                  <a:lnTo>
-                    <a:pt x="6328475" y="155794"/>
-                  </a:lnTo>
-                  <a:lnTo>
-                    <a:pt x="6416371" y="133568"/>
-                  </a:lnTo>
-                  <a:lnTo>
-                    <a:pt x="6504266" y="111331"/>
-                  </a:lnTo>
-                  <a:lnTo>
-                    <a:pt x="6592162" y="89083"/>
-                  </a:lnTo>
-                  <a:lnTo>
-                    <a:pt x="6680057" y="66826"/>
-                  </a:lnTo>
-                  <a:lnTo>
-                    <a:pt x="6767953" y="44559"/>
-                  </a:lnTo>
-                  <a:lnTo>
-                    <a:pt x="6855848" y="22283"/>
+                    <a:pt x="87895" y="1446392"/>
+                  </a:lnTo>
+                  <a:lnTo>
+                    <a:pt x="175790" y="1434996"/>
+                  </a:lnTo>
+                  <a:lnTo>
+                    <a:pt x="263686" y="1423549"/>
+                  </a:lnTo>
+                  <a:lnTo>
+                    <a:pt x="351581" y="1412048"/>
+                  </a:lnTo>
+                  <a:lnTo>
+                    <a:pt x="439477" y="1400485"/>
+                  </a:lnTo>
+                  <a:lnTo>
+                    <a:pt x="527372" y="1388856"/>
+                  </a:lnTo>
+                  <a:lnTo>
+                    <a:pt x="615268" y="1377153"/>
+                  </a:lnTo>
+                  <a:lnTo>
+                    <a:pt x="703163" y="1365369"/>
+                  </a:lnTo>
+                  <a:lnTo>
+                    <a:pt x="791059" y="1353496"/>
+                  </a:lnTo>
+                  <a:lnTo>
+                    <a:pt x="878954" y="1341524"/>
+                  </a:lnTo>
+                  <a:lnTo>
+                    <a:pt x="966850" y="1329441"/>
+                  </a:lnTo>
+                  <a:lnTo>
+                    <a:pt x="1054745" y="1317237"/>
+                  </a:lnTo>
+                  <a:lnTo>
+                    <a:pt x="1142641" y="1304898"/>
+                  </a:lnTo>
+                  <a:lnTo>
+                    <a:pt x="1230536" y="1292408"/>
+                  </a:lnTo>
+                  <a:lnTo>
+                    <a:pt x="1318432" y="1279751"/>
+                  </a:lnTo>
+                  <a:lnTo>
+                    <a:pt x="1406327" y="1266909"/>
+                  </a:lnTo>
+                  <a:lnTo>
+                    <a:pt x="1494223" y="1253862"/>
+                  </a:lnTo>
+                  <a:lnTo>
+                    <a:pt x="1582118" y="1240587"/>
+                  </a:lnTo>
+                  <a:lnTo>
+                    <a:pt x="1670014" y="1227061"/>
+                  </a:lnTo>
+                  <a:lnTo>
+                    <a:pt x="1757909" y="1213260"/>
+                  </a:lnTo>
+                  <a:lnTo>
+                    <a:pt x="1845805" y="1199159"/>
+                  </a:lnTo>
+                  <a:lnTo>
+                    <a:pt x="1933700" y="1184731"/>
+                  </a:lnTo>
+                  <a:lnTo>
+                    <a:pt x="2021596" y="1169953"/>
+                  </a:lnTo>
+                  <a:lnTo>
+                    <a:pt x="2109491" y="1154801"/>
+                  </a:lnTo>
+                  <a:lnTo>
+                    <a:pt x="2197387" y="1139256"/>
+                  </a:lnTo>
+                  <a:lnTo>
+                    <a:pt x="2285282" y="1123302"/>
+                  </a:lnTo>
+                  <a:lnTo>
+                    <a:pt x="2373178" y="1106928"/>
+                  </a:lnTo>
+                  <a:lnTo>
+                    <a:pt x="2461073" y="1090130"/>
+                  </a:lnTo>
+                  <a:lnTo>
+                    <a:pt x="2548969" y="1072910"/>
+                  </a:lnTo>
+                  <a:lnTo>
+                    <a:pt x="2636864" y="1055275"/>
+                  </a:lnTo>
+                  <a:lnTo>
+                    <a:pt x="2724760" y="1037237"/>
+                  </a:lnTo>
+                  <a:lnTo>
+                    <a:pt x="2812655" y="1018815"/>
+                  </a:lnTo>
+                  <a:lnTo>
+                    <a:pt x="2900551" y="1000031"/>
+                  </a:lnTo>
+                  <a:lnTo>
+                    <a:pt x="2988446" y="980907"/>
+                  </a:lnTo>
+                  <a:lnTo>
+                    <a:pt x="3076342" y="961469"/>
+                  </a:lnTo>
+                  <a:lnTo>
+                    <a:pt x="3164237" y="941743"/>
+                  </a:lnTo>
+                  <a:lnTo>
+                    <a:pt x="3252133" y="921753"/>
+                  </a:lnTo>
+                  <a:lnTo>
+                    <a:pt x="3340028" y="901524"/>
+                  </a:lnTo>
+                  <a:lnTo>
+                    <a:pt x="3427924" y="881079"/>
+                  </a:lnTo>
+                  <a:lnTo>
+                    <a:pt x="3515819" y="860438"/>
+                  </a:lnTo>
+                  <a:lnTo>
+                    <a:pt x="3603715" y="839620"/>
+                  </a:lnTo>
+                  <a:lnTo>
+                    <a:pt x="3691610" y="818644"/>
+                  </a:lnTo>
+                  <a:lnTo>
+                    <a:pt x="3779506" y="797524"/>
+                  </a:lnTo>
+                  <a:lnTo>
+                    <a:pt x="3867401" y="776276"/>
+                  </a:lnTo>
+                  <a:lnTo>
+                    <a:pt x="3955297" y="754913"/>
+                  </a:lnTo>
+                  <a:lnTo>
+                    <a:pt x="4043192" y="733444"/>
+                  </a:lnTo>
+                  <a:lnTo>
+                    <a:pt x="4131088" y="711881"/>
+                  </a:lnTo>
+                  <a:lnTo>
+                    <a:pt x="4218983" y="690233"/>
+                  </a:lnTo>
+                  <a:lnTo>
+                    <a:pt x="4306879" y="668507"/>
+                  </a:lnTo>
+                  <a:lnTo>
+                    <a:pt x="4394774" y="646711"/>
+                  </a:lnTo>
+                  <a:lnTo>
+                    <a:pt x="4482670" y="624852"/>
+                  </a:lnTo>
+                  <a:lnTo>
+                    <a:pt x="4570565" y="602934"/>
+                  </a:lnTo>
+                  <a:lnTo>
+                    <a:pt x="4658461" y="580964"/>
+                  </a:lnTo>
+                  <a:lnTo>
+                    <a:pt x="4746356" y="558945"/>
+                  </a:lnTo>
+                  <a:lnTo>
+                    <a:pt x="4834252" y="536882"/>
+                  </a:lnTo>
+                  <a:lnTo>
+                    <a:pt x="4922147" y="514778"/>
+                  </a:lnTo>
+                  <a:lnTo>
+                    <a:pt x="5010043" y="492637"/>
+                  </a:lnTo>
+                  <a:lnTo>
+                    <a:pt x="5097938" y="470462"/>
+                  </a:lnTo>
+                  <a:lnTo>
+                    <a:pt x="5185834" y="448255"/>
+                  </a:lnTo>
+                  <a:lnTo>
+                    <a:pt x="5273729" y="426018"/>
+                  </a:lnTo>
+                  <a:lnTo>
+                    <a:pt x="5361625" y="403755"/>
+                  </a:lnTo>
+                  <a:lnTo>
+                    <a:pt x="5449520" y="381466"/>
+                  </a:lnTo>
+                  <a:lnTo>
+                    <a:pt x="5537416" y="359155"/>
+                  </a:lnTo>
+                  <a:lnTo>
+                    <a:pt x="5625311" y="336821"/>
+                  </a:lnTo>
+                  <a:lnTo>
+                    <a:pt x="5713207" y="314468"/>
+                  </a:lnTo>
+                  <a:lnTo>
+                    <a:pt x="5801102" y="292095"/>
+                  </a:lnTo>
+                  <a:lnTo>
+                    <a:pt x="5888998" y="269706"/>
+                  </a:lnTo>
+                  <a:lnTo>
+                    <a:pt x="5976893" y="247299"/>
+                  </a:lnTo>
+                  <a:lnTo>
+                    <a:pt x="6064789" y="224878"/>
+                  </a:lnTo>
+                  <a:lnTo>
+                    <a:pt x="6152684" y="202442"/>
+                  </a:lnTo>
+                  <a:lnTo>
+                    <a:pt x="6240580" y="179993"/>
+                  </a:lnTo>
+                  <a:lnTo>
+                    <a:pt x="6328475" y="157531"/>
+                  </a:lnTo>
+                  <a:lnTo>
+                    <a:pt x="6416371" y="135057"/>
+                  </a:lnTo>
+                  <a:lnTo>
+                    <a:pt x="6504266" y="112572"/>
+                  </a:lnTo>
+                  <a:lnTo>
+                    <a:pt x="6592162" y="90076"/>
+                  </a:lnTo>
+                  <a:lnTo>
+                    <a:pt x="6680057" y="67571"/>
+                  </a:lnTo>
+                  <a:lnTo>
+                    <a:pt x="6767953" y="45056"/>
+                  </a:lnTo>
+                  <a:lnTo>
+                    <a:pt x="6855848" y="22532"/>
                   </a:lnTo>
                   <a:lnTo>
                     <a:pt x="6943744" y="0"/>
@@ -8863,258 +8828,258 @@
         </p:sp>
         <p:sp>
           <p:nvSpPr>
-            <p:cNvPr id="168" name="pl168"/>
-            <p:cNvSpPr/>
-            <p:nvPr/>
-          </p:nvSpPr>
-          <p:spPr>
-            <a:xfrm>
-              <a:off x="1326279" y="3971661"/>
-              <a:ext cx="6943744" cy="1159162"/>
+            <p:cNvPr id="167" name="pl167"/>
+            <p:cNvSpPr/>
+            <p:nvPr/>
+          </p:nvSpPr>
+          <p:spPr>
+            <a:xfrm>
+              <a:off x="1326279" y="3962713"/>
+              <a:ext cx="6943744" cy="1180243"/>
             </a:xfrm>
             <a:custGeom>
               <a:avLst/>
               <a:pathLst>
-                <a:path w="6943744" h="1159162">
+                <a:path w="6943744" h="1180243">
                   <a:moveTo>
                     <a:pt x="6943744" y="0"/>
                   </a:moveTo>
                   <a:lnTo>
-                    <a:pt x="6855848" y="10599"/>
-                  </a:lnTo>
-                  <a:lnTo>
-                    <a:pt x="6767953" y="21206"/>
-                  </a:lnTo>
-                  <a:lnTo>
-                    <a:pt x="6680057" y="31823"/>
-                  </a:lnTo>
-                  <a:lnTo>
-                    <a:pt x="6592162" y="42448"/>
-                  </a:lnTo>
-                  <a:lnTo>
-                    <a:pt x="6504266" y="53084"/>
-                  </a:lnTo>
-                  <a:lnTo>
-                    <a:pt x="6416371" y="63730"/>
-                  </a:lnTo>
-                  <a:lnTo>
-                    <a:pt x="6328475" y="74388"/>
-                  </a:lnTo>
-                  <a:lnTo>
-                    <a:pt x="6240580" y="85057"/>
-                  </a:lnTo>
-                  <a:lnTo>
-                    <a:pt x="6152684" y="95738"/>
-                  </a:lnTo>
-                  <a:lnTo>
-                    <a:pt x="6064789" y="106433"/>
-                  </a:lnTo>
-                  <a:lnTo>
-                    <a:pt x="5976893" y="117143"/>
-                  </a:lnTo>
-                  <a:lnTo>
-                    <a:pt x="5888998" y="127867"/>
-                  </a:lnTo>
-                  <a:lnTo>
-                    <a:pt x="5801102" y="138608"/>
-                  </a:lnTo>
-                  <a:lnTo>
-                    <a:pt x="5713207" y="149366"/>
-                  </a:lnTo>
-                  <a:lnTo>
-                    <a:pt x="5625311" y="160143"/>
-                  </a:lnTo>
-                  <a:lnTo>
-                    <a:pt x="5537416" y="170940"/>
-                  </a:lnTo>
-                  <a:lnTo>
-                    <a:pt x="5449520" y="181758"/>
-                  </a:lnTo>
-                  <a:lnTo>
-                    <a:pt x="5361625" y="192599"/>
-                  </a:lnTo>
-                  <a:lnTo>
-                    <a:pt x="5273729" y="203466"/>
-                  </a:lnTo>
-                  <a:lnTo>
-                    <a:pt x="5185834" y="214359"/>
-                  </a:lnTo>
-                  <a:lnTo>
-                    <a:pt x="5097938" y="225281"/>
-                  </a:lnTo>
-                  <a:lnTo>
-                    <a:pt x="5010043" y="236235"/>
-                  </a:lnTo>
-                  <a:lnTo>
-                    <a:pt x="4922147" y="247222"/>
-                  </a:lnTo>
-                  <a:lnTo>
-                    <a:pt x="4834252" y="258247"/>
-                  </a:lnTo>
-                  <a:lnTo>
-                    <a:pt x="4746356" y="269312"/>
-                  </a:lnTo>
-                  <a:lnTo>
-                    <a:pt x="4658461" y="280421"/>
-                  </a:lnTo>
-                  <a:lnTo>
-                    <a:pt x="4570565" y="291578"/>
-                  </a:lnTo>
-                  <a:lnTo>
-                    <a:pt x="4482670" y="302788"/>
-                  </a:lnTo>
-                  <a:lnTo>
-                    <a:pt x="4394774" y="314055"/>
-                  </a:lnTo>
-                  <a:lnTo>
-                    <a:pt x="4306879" y="325385"/>
-                  </a:lnTo>
-                  <a:lnTo>
-                    <a:pt x="4218983" y="336785"/>
-                  </a:lnTo>
-                  <a:lnTo>
-                    <a:pt x="4131088" y="348262"/>
-                  </a:lnTo>
-                  <a:lnTo>
-                    <a:pt x="4043192" y="359823"/>
-                  </a:lnTo>
-                  <a:lnTo>
-                    <a:pt x="3955297" y="371478"/>
-                  </a:lnTo>
-                  <a:lnTo>
-                    <a:pt x="3867401" y="383237"/>
-                  </a:lnTo>
-                  <a:lnTo>
-                    <a:pt x="3779506" y="395111"/>
-                  </a:lnTo>
-                  <a:lnTo>
-                    <a:pt x="3691610" y="407112"/>
-                  </a:lnTo>
-                  <a:lnTo>
-                    <a:pt x="3603715" y="419255"/>
-                  </a:lnTo>
-                  <a:lnTo>
-                    <a:pt x="3515819" y="431556"/>
-                  </a:lnTo>
-                  <a:lnTo>
-                    <a:pt x="3427924" y="444032"/>
-                  </a:lnTo>
-                  <a:lnTo>
-                    <a:pt x="3340028" y="456702"/>
-                  </a:lnTo>
-                  <a:lnTo>
-                    <a:pt x="3252133" y="469587"/>
-                  </a:lnTo>
-                  <a:lnTo>
-                    <a:pt x="3164237" y="482711"/>
-                  </a:lnTo>
-                  <a:lnTo>
-                    <a:pt x="3076342" y="496096"/>
-                  </a:lnTo>
-                  <a:lnTo>
-                    <a:pt x="2988446" y="509768"/>
-                  </a:lnTo>
-                  <a:lnTo>
-                    <a:pt x="2900551" y="523752"/>
-                  </a:lnTo>
-                  <a:lnTo>
-                    <a:pt x="2812655" y="538074"/>
-                  </a:lnTo>
-                  <a:lnTo>
-                    <a:pt x="2724760" y="552759"/>
-                  </a:lnTo>
-                  <a:lnTo>
-                    <a:pt x="2636864" y="567827"/>
-                  </a:lnTo>
-                  <a:lnTo>
-                    <a:pt x="2548969" y="583296"/>
-                  </a:lnTo>
-                  <a:lnTo>
-                    <a:pt x="2461073" y="599181"/>
-                  </a:lnTo>
-                  <a:lnTo>
-                    <a:pt x="2373178" y="615489"/>
-                  </a:lnTo>
-                  <a:lnTo>
-                    <a:pt x="2285282" y="632223"/>
-                  </a:lnTo>
-                  <a:lnTo>
-                    <a:pt x="2197387" y="649378"/>
-                  </a:lnTo>
-                  <a:lnTo>
-                    <a:pt x="2109491" y="666943"/>
-                  </a:lnTo>
-                  <a:lnTo>
-                    <a:pt x="2021596" y="684904"/>
-                  </a:lnTo>
-                  <a:lnTo>
-                    <a:pt x="1933700" y="703241"/>
-                  </a:lnTo>
-                  <a:lnTo>
-                    <a:pt x="1845805" y="721931"/>
-                  </a:lnTo>
-                  <a:lnTo>
-                    <a:pt x="1757909" y="740949"/>
-                  </a:lnTo>
-                  <a:lnTo>
-                    <a:pt x="1670014" y="760271"/>
-                  </a:lnTo>
-                  <a:lnTo>
-                    <a:pt x="1582118" y="779870"/>
-                  </a:lnTo>
-                  <a:lnTo>
-                    <a:pt x="1494223" y="799721"/>
-                  </a:lnTo>
-                  <a:lnTo>
-                    <a:pt x="1406327" y="819802"/>
-                  </a:lnTo>
-                  <a:lnTo>
-                    <a:pt x="1318432" y="840090"/>
-                  </a:lnTo>
-                  <a:lnTo>
-                    <a:pt x="1230536" y="860565"/>
-                  </a:lnTo>
-                  <a:lnTo>
-                    <a:pt x="1142641" y="881208"/>
-                  </a:lnTo>
-                  <a:lnTo>
-                    <a:pt x="1054745" y="902003"/>
-                  </a:lnTo>
-                  <a:lnTo>
-                    <a:pt x="966850" y="922934"/>
-                  </a:lnTo>
-                  <a:lnTo>
-                    <a:pt x="878954" y="943988"/>
-                  </a:lnTo>
-                  <a:lnTo>
-                    <a:pt x="791059" y="965152"/>
-                  </a:lnTo>
-                  <a:lnTo>
-                    <a:pt x="703163" y="986416"/>
-                  </a:lnTo>
-                  <a:lnTo>
-                    <a:pt x="615268" y="1007771"/>
-                  </a:lnTo>
-                  <a:lnTo>
-                    <a:pt x="527372" y="1029207"/>
-                  </a:lnTo>
-                  <a:lnTo>
-                    <a:pt x="439477" y="1050717"/>
-                  </a:lnTo>
-                  <a:lnTo>
-                    <a:pt x="351581" y="1072294"/>
-                  </a:lnTo>
-                  <a:lnTo>
-                    <a:pt x="263686" y="1093932"/>
-                  </a:lnTo>
-                  <a:lnTo>
-                    <a:pt x="175790" y="1115626"/>
-                  </a:lnTo>
-                  <a:lnTo>
-                    <a:pt x="87895" y="1137371"/>
-                  </a:lnTo>
-                  <a:lnTo>
-                    <a:pt x="0" y="1159162"/>
+                    <a:pt x="6855848" y="10859"/>
+                  </a:lnTo>
+                  <a:lnTo>
+                    <a:pt x="6767953" y="21728"/>
+                  </a:lnTo>
+                  <a:lnTo>
+                    <a:pt x="6680057" y="32605"/>
+                  </a:lnTo>
+                  <a:lnTo>
+                    <a:pt x="6592162" y="43492"/>
+                  </a:lnTo>
+                  <a:lnTo>
+                    <a:pt x="6504266" y="54388"/>
+                  </a:lnTo>
+                  <a:lnTo>
+                    <a:pt x="6416371" y="65295"/>
+                  </a:lnTo>
+                  <a:lnTo>
+                    <a:pt x="6328475" y="76214"/>
+                  </a:lnTo>
+                  <a:lnTo>
+                    <a:pt x="6240580" y="87144"/>
+                  </a:lnTo>
+                  <a:lnTo>
+                    <a:pt x="6152684" y="98087"/>
+                  </a:lnTo>
+                  <a:lnTo>
+                    <a:pt x="6064789" y="109043"/>
+                  </a:lnTo>
+                  <a:lnTo>
+                    <a:pt x="5976893" y="120014"/>
+                  </a:lnTo>
+                  <a:lnTo>
+                    <a:pt x="5888998" y="131000"/>
+                  </a:lnTo>
+                  <a:lnTo>
+                    <a:pt x="5801102" y="142003"/>
+                  </a:lnTo>
+                  <a:lnTo>
+                    <a:pt x="5713207" y="153023"/>
+                  </a:lnTo>
+                  <a:lnTo>
+                    <a:pt x="5625311" y="164061"/>
+                  </a:lnTo>
+                  <a:lnTo>
+                    <a:pt x="5537416" y="175120"/>
+                  </a:lnTo>
+                  <a:lnTo>
+                    <a:pt x="5449520" y="186201"/>
+                  </a:lnTo>
+                  <a:lnTo>
+                    <a:pt x="5361625" y="197304"/>
+                  </a:lnTo>
+                  <a:lnTo>
+                    <a:pt x="5273729" y="208433"/>
+                  </a:lnTo>
+                  <a:lnTo>
+                    <a:pt x="5185834" y="219589"/>
+                  </a:lnTo>
+                  <a:lnTo>
+                    <a:pt x="5097938" y="230774"/>
+                  </a:lnTo>
+                  <a:lnTo>
+                    <a:pt x="5010043" y="241991"/>
+                  </a:lnTo>
+                  <a:lnTo>
+                    <a:pt x="4922147" y="253242"/>
+                  </a:lnTo>
+                  <a:lnTo>
+                    <a:pt x="4834252" y="264530"/>
+                  </a:lnTo>
+                  <a:lnTo>
+                    <a:pt x="4746356" y="275860"/>
+                  </a:lnTo>
+                  <a:lnTo>
+                    <a:pt x="4658461" y="287233"/>
+                  </a:lnTo>
+                  <a:lnTo>
+                    <a:pt x="4570565" y="298655"/>
+                  </a:lnTo>
+                  <a:lnTo>
+                    <a:pt x="4482670" y="310129"/>
+                  </a:lnTo>
+                  <a:lnTo>
+                    <a:pt x="4394774" y="321662"/>
+                  </a:lnTo>
+                  <a:lnTo>
+                    <a:pt x="4306879" y="333259"/>
+                  </a:lnTo>
+                  <a:lnTo>
+                    <a:pt x="4218983" y="344925"/>
+                  </a:lnTo>
+                  <a:lnTo>
+                    <a:pt x="4131088" y="356669"/>
+                  </a:lnTo>
+                  <a:lnTo>
+                    <a:pt x="4043192" y="368499"/>
+                  </a:lnTo>
+                  <a:lnTo>
+                    <a:pt x="3955297" y="380422"/>
+                  </a:lnTo>
+                  <a:lnTo>
+                    <a:pt x="3867401" y="392451"/>
+                  </a:lnTo>
+                  <a:lnTo>
+                    <a:pt x="3779506" y="404595"/>
+                  </a:lnTo>
+                  <a:lnTo>
+                    <a:pt x="3691610" y="416868"/>
+                  </a:lnTo>
+                  <a:lnTo>
+                    <a:pt x="3603715" y="429284"/>
+                  </a:lnTo>
+                  <a:lnTo>
+                    <a:pt x="3515819" y="441858"/>
+                  </a:lnTo>
+                  <a:lnTo>
+                    <a:pt x="3427924" y="454609"/>
+                  </a:lnTo>
+                  <a:lnTo>
+                    <a:pt x="3340028" y="467556"/>
+                  </a:lnTo>
+                  <a:lnTo>
+                    <a:pt x="3252133" y="480719"/>
+                  </a:lnTo>
+                  <a:lnTo>
+                    <a:pt x="3164237" y="494122"/>
+                  </a:lnTo>
+                  <a:lnTo>
+                    <a:pt x="3076342" y="507788"/>
+                  </a:lnTo>
+                  <a:lnTo>
+                    <a:pt x="2988446" y="521742"/>
+                  </a:lnTo>
+                  <a:lnTo>
+                    <a:pt x="2900551" y="536011"/>
+                  </a:lnTo>
+                  <a:lnTo>
+                    <a:pt x="2812655" y="550618"/>
+                  </a:lnTo>
+                  <a:lnTo>
+                    <a:pt x="2724760" y="565589"/>
+                  </a:lnTo>
+                  <a:lnTo>
+                    <a:pt x="2636864" y="580944"/>
+                  </a:lnTo>
+                  <a:lnTo>
+                    <a:pt x="2548969" y="596700"/>
+                  </a:lnTo>
+                  <a:lnTo>
+                    <a:pt x="2461073" y="612872"/>
+                  </a:lnTo>
+                  <a:lnTo>
+                    <a:pt x="2373178" y="629467"/>
+                  </a:lnTo>
+                  <a:lnTo>
+                    <a:pt x="2285282" y="646485"/>
+                  </a:lnTo>
+                  <a:lnTo>
+                    <a:pt x="2197387" y="663924"/>
+                  </a:lnTo>
+                  <a:lnTo>
+                    <a:pt x="2109491" y="681771"/>
+                  </a:lnTo>
+                  <a:lnTo>
+                    <a:pt x="2021596" y="700011"/>
+                  </a:lnTo>
+                  <a:lnTo>
+                    <a:pt x="1933700" y="718625"/>
+                  </a:lnTo>
+                  <a:lnTo>
+                    <a:pt x="1845805" y="737590"/>
+                  </a:lnTo>
+                  <a:lnTo>
+                    <a:pt x="1757909" y="756880"/>
+                  </a:lnTo>
+                  <a:lnTo>
+                    <a:pt x="1670014" y="776471"/>
+                  </a:lnTo>
+                  <a:lnTo>
+                    <a:pt x="1582118" y="796338"/>
+                  </a:lnTo>
+                  <a:lnTo>
+                    <a:pt x="1494223" y="816455"/>
+                  </a:lnTo>
+                  <a:lnTo>
+                    <a:pt x="1406327" y="836800"/>
+                  </a:lnTo>
+                  <a:lnTo>
+                    <a:pt x="1318432" y="857350"/>
+                  </a:lnTo>
+                  <a:lnTo>
+                    <a:pt x="1230536" y="878086"/>
+                  </a:lnTo>
+                  <a:lnTo>
+                    <a:pt x="1142641" y="898988"/>
+                  </a:lnTo>
+                  <a:lnTo>
+                    <a:pt x="1054745" y="920041"/>
+                  </a:lnTo>
+                  <a:lnTo>
+                    <a:pt x="966850" y="941229"/>
+                  </a:lnTo>
+                  <a:lnTo>
+                    <a:pt x="878954" y="962539"/>
+                  </a:lnTo>
+                  <a:lnTo>
+                    <a:pt x="791059" y="983959"/>
+                  </a:lnTo>
+                  <a:lnTo>
+                    <a:pt x="703163" y="1005478"/>
+                  </a:lnTo>
+                  <a:lnTo>
+                    <a:pt x="615268" y="1027086"/>
+                  </a:lnTo>
+                  <a:lnTo>
+                    <a:pt x="527372" y="1048776"/>
+                  </a:lnTo>
+                  <a:lnTo>
+                    <a:pt x="439477" y="1070539"/>
+                  </a:lnTo>
+                  <a:lnTo>
+                    <a:pt x="351581" y="1092369"/>
+                  </a:lnTo>
+                  <a:lnTo>
+                    <a:pt x="263686" y="1114259"/>
+                  </a:lnTo>
+                  <a:lnTo>
+                    <a:pt x="175790" y="1136205"/>
+                  </a:lnTo>
+                  <a:lnTo>
+                    <a:pt x="87895" y="1158201"/>
+                  </a:lnTo>
+                  <a:lnTo>
+                    <a:pt x="0" y="1180243"/>
                   </a:lnTo>
                 </a:path>
               </a:pathLst>
@@ -9128,255 +9093,255 @@
         </p:sp>
         <p:sp>
           <p:nvSpPr>
-            <p:cNvPr id="169" name="pl169"/>
-            <p:cNvSpPr/>
-            <p:nvPr/>
-          </p:nvSpPr>
-          <p:spPr>
-            <a:xfrm>
-              <a:off x="1326279" y="3645876"/>
-              <a:ext cx="6943744" cy="1298885"/>
+            <p:cNvPr id="168" name="pl168"/>
+            <p:cNvSpPr/>
+            <p:nvPr/>
+          </p:nvSpPr>
+          <p:spPr>
+            <a:xfrm>
+              <a:off x="1326279" y="3637599"/>
+              <a:ext cx="6943744" cy="1318993"/>
             </a:xfrm>
             <a:custGeom>
               <a:avLst/>
               <a:pathLst>
-                <a:path w="6943744" h="1298885">
+                <a:path w="6943744" h="1318993">
                   <a:moveTo>
-                    <a:pt x="0" y="1298885"/>
+                    <a:pt x="0" y="1318993"/>
                   </a:moveTo>
                   <a:lnTo>
-                    <a:pt x="87895" y="1282444"/>
-                  </a:lnTo>
-                  <a:lnTo>
-                    <a:pt x="175790" y="1266002"/>
-                  </a:lnTo>
-                  <a:lnTo>
-                    <a:pt x="263686" y="1249560"/>
-                  </a:lnTo>
-                  <a:lnTo>
-                    <a:pt x="351581" y="1233119"/>
-                  </a:lnTo>
-                  <a:lnTo>
-                    <a:pt x="439477" y="1216677"/>
-                  </a:lnTo>
-                  <a:lnTo>
-                    <a:pt x="527372" y="1200236"/>
-                  </a:lnTo>
-                  <a:lnTo>
-                    <a:pt x="615268" y="1183794"/>
-                  </a:lnTo>
-                  <a:lnTo>
-                    <a:pt x="703163" y="1167352"/>
-                  </a:lnTo>
-                  <a:lnTo>
-                    <a:pt x="791059" y="1150911"/>
-                  </a:lnTo>
-                  <a:lnTo>
-                    <a:pt x="878954" y="1134469"/>
-                  </a:lnTo>
-                  <a:lnTo>
-                    <a:pt x="966850" y="1118028"/>
-                  </a:lnTo>
-                  <a:lnTo>
-                    <a:pt x="1054745" y="1101586"/>
-                  </a:lnTo>
-                  <a:lnTo>
-                    <a:pt x="1142641" y="1085144"/>
-                  </a:lnTo>
-                  <a:lnTo>
-                    <a:pt x="1230536" y="1068703"/>
-                  </a:lnTo>
-                  <a:lnTo>
-                    <a:pt x="1318432" y="1052261"/>
-                  </a:lnTo>
-                  <a:lnTo>
-                    <a:pt x="1406327" y="1035820"/>
-                  </a:lnTo>
-                  <a:lnTo>
-                    <a:pt x="1494223" y="1019378"/>
-                  </a:lnTo>
-                  <a:lnTo>
-                    <a:pt x="1582118" y="1002937"/>
-                  </a:lnTo>
-                  <a:lnTo>
-                    <a:pt x="1670014" y="986495"/>
-                  </a:lnTo>
-                  <a:lnTo>
-                    <a:pt x="1757909" y="970053"/>
-                  </a:lnTo>
-                  <a:lnTo>
-                    <a:pt x="1845805" y="953612"/>
-                  </a:lnTo>
-                  <a:lnTo>
-                    <a:pt x="1933700" y="937170"/>
-                  </a:lnTo>
-                  <a:lnTo>
-                    <a:pt x="2021596" y="920729"/>
-                  </a:lnTo>
-                  <a:lnTo>
-                    <a:pt x="2109491" y="904287"/>
-                  </a:lnTo>
-                  <a:lnTo>
-                    <a:pt x="2197387" y="887845"/>
-                  </a:lnTo>
-                  <a:lnTo>
-                    <a:pt x="2285282" y="871404"/>
-                  </a:lnTo>
-                  <a:lnTo>
-                    <a:pt x="2373178" y="854962"/>
-                  </a:lnTo>
-                  <a:lnTo>
-                    <a:pt x="2461073" y="838521"/>
-                  </a:lnTo>
-                  <a:lnTo>
-                    <a:pt x="2548969" y="822079"/>
-                  </a:lnTo>
-                  <a:lnTo>
-                    <a:pt x="2636864" y="805637"/>
-                  </a:lnTo>
-                  <a:lnTo>
-                    <a:pt x="2724760" y="789196"/>
-                  </a:lnTo>
-                  <a:lnTo>
-                    <a:pt x="2812655" y="772754"/>
-                  </a:lnTo>
-                  <a:lnTo>
-                    <a:pt x="2900551" y="756313"/>
-                  </a:lnTo>
-                  <a:lnTo>
-                    <a:pt x="2988446" y="739871"/>
-                  </a:lnTo>
-                  <a:lnTo>
-                    <a:pt x="3076342" y="723429"/>
-                  </a:lnTo>
-                  <a:lnTo>
-                    <a:pt x="3164237" y="706988"/>
-                  </a:lnTo>
-                  <a:lnTo>
-                    <a:pt x="3252133" y="690546"/>
-                  </a:lnTo>
-                  <a:lnTo>
-                    <a:pt x="3340028" y="674105"/>
-                  </a:lnTo>
-                  <a:lnTo>
-                    <a:pt x="3427924" y="657663"/>
-                  </a:lnTo>
-                  <a:lnTo>
-                    <a:pt x="3515819" y="641222"/>
-                  </a:lnTo>
-                  <a:lnTo>
-                    <a:pt x="3603715" y="624780"/>
-                  </a:lnTo>
-                  <a:lnTo>
-                    <a:pt x="3691610" y="608338"/>
-                  </a:lnTo>
-                  <a:lnTo>
-                    <a:pt x="3779506" y="591897"/>
-                  </a:lnTo>
-                  <a:lnTo>
-                    <a:pt x="3867401" y="575455"/>
-                  </a:lnTo>
-                  <a:lnTo>
-                    <a:pt x="3955297" y="559014"/>
-                  </a:lnTo>
-                  <a:lnTo>
-                    <a:pt x="4043192" y="542572"/>
-                  </a:lnTo>
-                  <a:lnTo>
-                    <a:pt x="4131088" y="526130"/>
-                  </a:lnTo>
-                  <a:lnTo>
-                    <a:pt x="4218983" y="509689"/>
-                  </a:lnTo>
-                  <a:lnTo>
-                    <a:pt x="4306879" y="493247"/>
-                  </a:lnTo>
-                  <a:lnTo>
-                    <a:pt x="4394774" y="476806"/>
-                  </a:lnTo>
-                  <a:lnTo>
-                    <a:pt x="4482670" y="460364"/>
-                  </a:lnTo>
-                  <a:lnTo>
-                    <a:pt x="4570565" y="443922"/>
-                  </a:lnTo>
-                  <a:lnTo>
-                    <a:pt x="4658461" y="427481"/>
-                  </a:lnTo>
-                  <a:lnTo>
-                    <a:pt x="4746356" y="411039"/>
-                  </a:lnTo>
-                  <a:lnTo>
-                    <a:pt x="4834252" y="394598"/>
-                  </a:lnTo>
-                  <a:lnTo>
-                    <a:pt x="4922147" y="378156"/>
-                  </a:lnTo>
-                  <a:lnTo>
-                    <a:pt x="5010043" y="361714"/>
-                  </a:lnTo>
-                  <a:lnTo>
-                    <a:pt x="5097938" y="345273"/>
-                  </a:lnTo>
-                  <a:lnTo>
-                    <a:pt x="5185834" y="328831"/>
-                  </a:lnTo>
-                  <a:lnTo>
-                    <a:pt x="5273729" y="312390"/>
-                  </a:lnTo>
-                  <a:lnTo>
-                    <a:pt x="5361625" y="295948"/>
-                  </a:lnTo>
-                  <a:lnTo>
-                    <a:pt x="5449520" y="279507"/>
-                  </a:lnTo>
-                  <a:lnTo>
-                    <a:pt x="5537416" y="263065"/>
-                  </a:lnTo>
-                  <a:lnTo>
-                    <a:pt x="5625311" y="246623"/>
-                  </a:lnTo>
-                  <a:lnTo>
-                    <a:pt x="5713207" y="230182"/>
-                  </a:lnTo>
-                  <a:lnTo>
-                    <a:pt x="5801102" y="213740"/>
-                  </a:lnTo>
-                  <a:lnTo>
-                    <a:pt x="5888998" y="197299"/>
-                  </a:lnTo>
-                  <a:lnTo>
-                    <a:pt x="5976893" y="180857"/>
-                  </a:lnTo>
-                  <a:lnTo>
-                    <a:pt x="6064789" y="164415"/>
-                  </a:lnTo>
-                  <a:lnTo>
-                    <a:pt x="6152684" y="147974"/>
-                  </a:lnTo>
-                  <a:lnTo>
-                    <a:pt x="6240580" y="131532"/>
-                  </a:lnTo>
-                  <a:lnTo>
-                    <a:pt x="6328475" y="115091"/>
-                  </a:lnTo>
-                  <a:lnTo>
-                    <a:pt x="6416371" y="98649"/>
-                  </a:lnTo>
-                  <a:lnTo>
-                    <a:pt x="6504266" y="82207"/>
-                  </a:lnTo>
-                  <a:lnTo>
-                    <a:pt x="6592162" y="65766"/>
-                  </a:lnTo>
-                  <a:lnTo>
-                    <a:pt x="6680057" y="49324"/>
-                  </a:lnTo>
-                  <a:lnTo>
-                    <a:pt x="6767953" y="32883"/>
-                  </a:lnTo>
-                  <a:lnTo>
-                    <a:pt x="6855848" y="16441"/>
+                    <a:pt x="87895" y="1302296"/>
+                  </a:lnTo>
+                  <a:lnTo>
+                    <a:pt x="175790" y="1285600"/>
+                  </a:lnTo>
+                  <a:lnTo>
+                    <a:pt x="263686" y="1268904"/>
+                  </a:lnTo>
+                  <a:lnTo>
+                    <a:pt x="351581" y="1252208"/>
+                  </a:lnTo>
+                  <a:lnTo>
+                    <a:pt x="439477" y="1235512"/>
+                  </a:lnTo>
+                  <a:lnTo>
+                    <a:pt x="527372" y="1218816"/>
+                  </a:lnTo>
+                  <a:lnTo>
+                    <a:pt x="615268" y="1202120"/>
+                  </a:lnTo>
+                  <a:lnTo>
+                    <a:pt x="703163" y="1185424"/>
+                  </a:lnTo>
+                  <a:lnTo>
+                    <a:pt x="791059" y="1168727"/>
+                  </a:lnTo>
+                  <a:lnTo>
+                    <a:pt x="878954" y="1152031"/>
+                  </a:lnTo>
+                  <a:lnTo>
+                    <a:pt x="966850" y="1135335"/>
+                  </a:lnTo>
+                  <a:lnTo>
+                    <a:pt x="1054745" y="1118639"/>
+                  </a:lnTo>
+                  <a:lnTo>
+                    <a:pt x="1142641" y="1101943"/>
+                  </a:lnTo>
+                  <a:lnTo>
+                    <a:pt x="1230536" y="1085247"/>
+                  </a:lnTo>
+                  <a:lnTo>
+                    <a:pt x="1318432" y="1068551"/>
+                  </a:lnTo>
+                  <a:lnTo>
+                    <a:pt x="1406327" y="1051855"/>
+                  </a:lnTo>
+                  <a:lnTo>
+                    <a:pt x="1494223" y="1035159"/>
+                  </a:lnTo>
+                  <a:lnTo>
+                    <a:pt x="1582118" y="1018462"/>
+                  </a:lnTo>
+                  <a:lnTo>
+                    <a:pt x="1670014" y="1001766"/>
+                  </a:lnTo>
+                  <a:lnTo>
+                    <a:pt x="1757909" y="985070"/>
+                  </a:lnTo>
+                  <a:lnTo>
+                    <a:pt x="1845805" y="968374"/>
+                  </a:lnTo>
+                  <a:lnTo>
+                    <a:pt x="1933700" y="951678"/>
+                  </a:lnTo>
+                  <a:lnTo>
+                    <a:pt x="2021596" y="934982"/>
+                  </a:lnTo>
+                  <a:lnTo>
+                    <a:pt x="2109491" y="918286"/>
+                  </a:lnTo>
+                  <a:lnTo>
+                    <a:pt x="2197387" y="901590"/>
+                  </a:lnTo>
+                  <a:lnTo>
+                    <a:pt x="2285282" y="884894"/>
+                  </a:lnTo>
+                  <a:lnTo>
+                    <a:pt x="2373178" y="868197"/>
+                  </a:lnTo>
+                  <a:lnTo>
+                    <a:pt x="2461073" y="851501"/>
+                  </a:lnTo>
+                  <a:lnTo>
+                    <a:pt x="2548969" y="834805"/>
+                  </a:lnTo>
+                  <a:lnTo>
+                    <a:pt x="2636864" y="818109"/>
+                  </a:lnTo>
+                  <a:lnTo>
+                    <a:pt x="2724760" y="801413"/>
+                  </a:lnTo>
+                  <a:lnTo>
+                    <a:pt x="2812655" y="784717"/>
+                  </a:lnTo>
+                  <a:lnTo>
+                    <a:pt x="2900551" y="768021"/>
+                  </a:lnTo>
+                  <a:lnTo>
+                    <a:pt x="2988446" y="751325"/>
+                  </a:lnTo>
+                  <a:lnTo>
+                    <a:pt x="3076342" y="734629"/>
+                  </a:lnTo>
+                  <a:lnTo>
+                    <a:pt x="3164237" y="717932"/>
+                  </a:lnTo>
+                  <a:lnTo>
+                    <a:pt x="3252133" y="701236"/>
+                  </a:lnTo>
+                  <a:lnTo>
+                    <a:pt x="3340028" y="684540"/>
+                  </a:lnTo>
+                  <a:lnTo>
+                    <a:pt x="3427924" y="667844"/>
+                  </a:lnTo>
+                  <a:lnTo>
+                    <a:pt x="3515819" y="651148"/>
+                  </a:lnTo>
+                  <a:lnTo>
+                    <a:pt x="3603715" y="634452"/>
+                  </a:lnTo>
+                  <a:lnTo>
+                    <a:pt x="3691610" y="617756"/>
+                  </a:lnTo>
+                  <a:lnTo>
+                    <a:pt x="3779506" y="601060"/>
+                  </a:lnTo>
+                  <a:lnTo>
+                    <a:pt x="3867401" y="584363"/>
+                  </a:lnTo>
+                  <a:lnTo>
+                    <a:pt x="3955297" y="567667"/>
+                  </a:lnTo>
+                  <a:lnTo>
+                    <a:pt x="4043192" y="550971"/>
+                  </a:lnTo>
+                  <a:lnTo>
+                    <a:pt x="4131088" y="534275"/>
+                  </a:lnTo>
+                  <a:lnTo>
+                    <a:pt x="4218983" y="517579"/>
+                  </a:lnTo>
+                  <a:lnTo>
+                    <a:pt x="4306879" y="500883"/>
+                  </a:lnTo>
+                  <a:lnTo>
+                    <a:pt x="4394774" y="484187"/>
+                  </a:lnTo>
+                  <a:lnTo>
+                    <a:pt x="4482670" y="467491"/>
+                  </a:lnTo>
+                  <a:lnTo>
+                    <a:pt x="4570565" y="450795"/>
+                  </a:lnTo>
+                  <a:lnTo>
+                    <a:pt x="4658461" y="434098"/>
+                  </a:lnTo>
+                  <a:lnTo>
+                    <a:pt x="4746356" y="417402"/>
+                  </a:lnTo>
+                  <a:lnTo>
+                    <a:pt x="4834252" y="400706"/>
+                  </a:lnTo>
+                  <a:lnTo>
+                    <a:pt x="4922147" y="384010"/>
+                  </a:lnTo>
+                  <a:lnTo>
+                    <a:pt x="5010043" y="367314"/>
+                  </a:lnTo>
+                  <a:lnTo>
+                    <a:pt x="5097938" y="350618"/>
+                  </a:lnTo>
+                  <a:lnTo>
+                    <a:pt x="5185834" y="333922"/>
+                  </a:lnTo>
+                  <a:lnTo>
+                    <a:pt x="5273729" y="317226"/>
+                  </a:lnTo>
+                  <a:lnTo>
+                    <a:pt x="5361625" y="300530"/>
+                  </a:lnTo>
+                  <a:lnTo>
+                    <a:pt x="5449520" y="283833"/>
+                  </a:lnTo>
+                  <a:lnTo>
+                    <a:pt x="5537416" y="267137"/>
+                  </a:lnTo>
+                  <a:lnTo>
+                    <a:pt x="5625311" y="250441"/>
+                  </a:lnTo>
+                  <a:lnTo>
+                    <a:pt x="5713207" y="233745"/>
+                  </a:lnTo>
+                  <a:lnTo>
+                    <a:pt x="5801102" y="217049"/>
+                  </a:lnTo>
+                  <a:lnTo>
+                    <a:pt x="5888998" y="200353"/>
+                  </a:lnTo>
+                  <a:lnTo>
+                    <a:pt x="5976893" y="183657"/>
+                  </a:lnTo>
+                  <a:lnTo>
+                    <a:pt x="6064789" y="166961"/>
+                  </a:lnTo>
+                  <a:lnTo>
+                    <a:pt x="6152684" y="150265"/>
+                  </a:lnTo>
+                  <a:lnTo>
+                    <a:pt x="6240580" y="133568"/>
+                  </a:lnTo>
+                  <a:lnTo>
+                    <a:pt x="6328475" y="116872"/>
+                  </a:lnTo>
+                  <a:lnTo>
+                    <a:pt x="6416371" y="100176"/>
+                  </a:lnTo>
+                  <a:lnTo>
+                    <a:pt x="6504266" y="83480"/>
+                  </a:lnTo>
+                  <a:lnTo>
+                    <a:pt x="6592162" y="66784"/>
+                  </a:lnTo>
+                  <a:lnTo>
+                    <a:pt x="6680057" y="50088"/>
+                  </a:lnTo>
+                  <a:lnTo>
+                    <a:pt x="6767953" y="33392"/>
+                  </a:lnTo>
+                  <a:lnTo>
+                    <a:pt x="6855848" y="16696"/>
                   </a:lnTo>
                   <a:lnTo>
                     <a:pt x="6943744" y="0"/>
@@ -9402,7 +9367,7 @@
         </p:sp>
         <p:sp>
           <p:nvSpPr>
-            <p:cNvPr id="170" name="tx170"/>
+            <p:cNvPr id="169" name="tx169"/>
             <p:cNvSpPr/>
             <p:nvPr/>
           </p:nvSpPr>
@@ -9448,7 +9413,7 @@
         </p:sp>
         <p:sp>
           <p:nvSpPr>
-            <p:cNvPr id="171" name="tx171"/>
+            <p:cNvPr id="170" name="tx170"/>
             <p:cNvSpPr/>
             <p:nvPr/>
           </p:nvSpPr>
@@ -9494,7 +9459,7 @@
         </p:sp>
         <p:sp>
           <p:nvSpPr>
-            <p:cNvPr id="172" name="tx172"/>
+            <p:cNvPr id="171" name="tx171"/>
             <p:cNvSpPr/>
             <p:nvPr/>
           </p:nvSpPr>
@@ -9540,7 +9505,7 @@
         </p:sp>
         <p:sp>
           <p:nvSpPr>
-            <p:cNvPr id="173" name="tx173"/>
+            <p:cNvPr id="172" name="tx172"/>
             <p:cNvSpPr/>
             <p:nvPr/>
           </p:nvSpPr>
@@ -9586,7 +9551,7 @@
         </p:sp>
         <p:sp>
           <p:nvSpPr>
-            <p:cNvPr id="174" name="tx174"/>
+            <p:cNvPr id="173" name="tx173"/>
             <p:cNvSpPr/>
             <p:nvPr/>
           </p:nvSpPr>
@@ -9632,7 +9597,7 @@
         </p:sp>
         <p:sp>
           <p:nvSpPr>
-            <p:cNvPr id="175" name="tx175"/>
+            <p:cNvPr id="174" name="tx174"/>
             <p:cNvSpPr/>
             <p:nvPr/>
           </p:nvSpPr>
@@ -9678,7 +9643,7 @@
         </p:sp>
         <p:sp>
           <p:nvSpPr>
-            <p:cNvPr id="176" name="tx176"/>
+            <p:cNvPr id="175" name="tx175"/>
             <p:cNvSpPr/>
             <p:nvPr/>
           </p:nvSpPr>
@@ -9724,7 +9689,7 @@
         </p:sp>
         <p:sp>
           <p:nvSpPr>
-            <p:cNvPr id="177" name="tx177"/>
+            <p:cNvPr id="176" name="tx176"/>
             <p:cNvSpPr/>
             <p:nvPr/>
           </p:nvSpPr>
@@ -9770,7 +9735,7 @@
         </p:sp>
         <p:sp>
           <p:nvSpPr>
-            <p:cNvPr id="178" name="tx178"/>
+            <p:cNvPr id="177" name="tx177"/>
             <p:cNvSpPr/>
             <p:nvPr/>
           </p:nvSpPr>
@@ -9816,7 +9781,7 @@
         </p:sp>
         <p:sp>
           <p:nvSpPr>
-            <p:cNvPr id="179" name="tx179"/>
+            <p:cNvPr id="178" name="tx178"/>
             <p:cNvSpPr/>
             <p:nvPr/>
           </p:nvSpPr>
@@ -9862,7 +9827,7 @@
         </p:sp>
         <p:sp>
           <p:nvSpPr>
-            <p:cNvPr id="180" name="tx180"/>
+            <p:cNvPr id="179" name="tx179"/>
             <p:cNvSpPr/>
             <p:nvPr/>
           </p:nvSpPr>
@@ -9908,7 +9873,7 @@
         </p:sp>
         <p:sp>
           <p:nvSpPr>
-            <p:cNvPr id="181" name="tx181"/>
+            <p:cNvPr id="180" name="tx180"/>
             <p:cNvSpPr/>
             <p:nvPr/>
           </p:nvSpPr>
